--- a/docs/pptx/entire/ritu-entire-linsubhr-ratio-throm2_10pct.pptx
+++ b/docs/pptx/entire/ritu-entire-linsubhr-ratio-throm2_10pct.pptx
@@ -3433,602 +3433,602 @@
           <p:spPr>
             <a:xfrm>
               <a:off x="1172049" y="2073503"/>
-              <a:ext cx="7090630" cy="3328167"/>
+              <a:ext cx="7090630" cy="3328883"/>
             </a:xfrm>
             <a:custGeom>
               <a:avLst/>
               <a:pathLst>
-                <a:path w="7090630" h="3328167">
+                <a:path w="7090630" h="3328883">
                   <a:moveTo>
-                    <a:pt x="265535" y="0"/>
+                    <a:pt x="274124" y="0"/>
                   </a:moveTo>
                   <a:lnTo>
-                    <a:pt x="286490" y="33472"/>
-                  </a:lnTo>
-                  <a:lnTo>
-                    <a:pt x="358112" y="144209"/>
-                  </a:lnTo>
-                  <a:lnTo>
-                    <a:pt x="429735" y="251392"/>
-                  </a:lnTo>
-                  <a:lnTo>
-                    <a:pt x="501357" y="355136"/>
-                  </a:lnTo>
-                  <a:lnTo>
-                    <a:pt x="572980" y="455549"/>
-                  </a:lnTo>
-                  <a:lnTo>
-                    <a:pt x="644602" y="552740"/>
-                  </a:lnTo>
-                  <a:lnTo>
-                    <a:pt x="716225" y="646811"/>
-                  </a:lnTo>
-                  <a:lnTo>
-                    <a:pt x="787847" y="737863"/>
-                  </a:lnTo>
-                  <a:lnTo>
-                    <a:pt x="859470" y="825993"/>
-                  </a:lnTo>
-                  <a:lnTo>
-                    <a:pt x="931092" y="911294"/>
-                  </a:lnTo>
-                  <a:lnTo>
-                    <a:pt x="1002715" y="993858"/>
-                  </a:lnTo>
-                  <a:lnTo>
-                    <a:pt x="1074337" y="1073771"/>
-                  </a:lnTo>
-                  <a:lnTo>
-                    <a:pt x="1145960" y="1151120"/>
-                  </a:lnTo>
-                  <a:lnTo>
-                    <a:pt x="1217582" y="1225986"/>
-                  </a:lnTo>
-                  <a:lnTo>
-                    <a:pt x="1289205" y="1298450"/>
-                  </a:lnTo>
-                  <a:lnTo>
-                    <a:pt x="1360827" y="1368587"/>
-                  </a:lnTo>
-                  <a:lnTo>
-                    <a:pt x="1432450" y="1436474"/>
-                  </a:lnTo>
-                  <a:lnTo>
-                    <a:pt x="1504073" y="1502181"/>
-                  </a:lnTo>
-                  <a:lnTo>
-                    <a:pt x="1575695" y="1565780"/>
-                  </a:lnTo>
-                  <a:lnTo>
-                    <a:pt x="1647318" y="1627338"/>
-                  </a:lnTo>
-                  <a:lnTo>
-                    <a:pt x="1718940" y="1686920"/>
-                  </a:lnTo>
-                  <a:lnTo>
-                    <a:pt x="1790563" y="1744589"/>
-                  </a:lnTo>
-                  <a:lnTo>
-                    <a:pt x="1862185" y="1800408"/>
-                  </a:lnTo>
-                  <a:lnTo>
-                    <a:pt x="1933808" y="1854435"/>
-                  </a:lnTo>
-                  <a:lnTo>
-                    <a:pt x="2005430" y="1906728"/>
-                  </a:lnTo>
-                  <a:lnTo>
-                    <a:pt x="2077053" y="1957343"/>
-                  </a:lnTo>
-                  <a:lnTo>
-                    <a:pt x="2148675" y="2006333"/>
-                  </a:lnTo>
-                  <a:lnTo>
-                    <a:pt x="2220298" y="2053751"/>
-                  </a:lnTo>
-                  <a:lnTo>
-                    <a:pt x="2291920" y="2099647"/>
-                  </a:lnTo>
-                  <a:lnTo>
-                    <a:pt x="2363543" y="2144070"/>
-                  </a:lnTo>
-                  <a:lnTo>
-                    <a:pt x="2435165" y="2187067"/>
-                  </a:lnTo>
-                  <a:lnTo>
-                    <a:pt x="2506788" y="2228685"/>
-                  </a:lnTo>
-                  <a:lnTo>
-                    <a:pt x="2578410" y="2268966"/>
-                  </a:lnTo>
-                  <a:lnTo>
-                    <a:pt x="2650033" y="2307955"/>
-                  </a:lnTo>
-                  <a:lnTo>
-                    <a:pt x="2721655" y="2345692"/>
-                  </a:lnTo>
-                  <a:lnTo>
-                    <a:pt x="2793278" y="2382218"/>
-                  </a:lnTo>
-                  <a:lnTo>
-                    <a:pt x="2864901" y="2417572"/>
-                  </a:lnTo>
-                  <a:lnTo>
-                    <a:pt x="2936523" y="2451791"/>
-                  </a:lnTo>
-                  <a:lnTo>
-                    <a:pt x="3008146" y="2484912"/>
-                  </a:lnTo>
-                  <a:lnTo>
-                    <a:pt x="3079768" y="2516970"/>
-                  </a:lnTo>
-                  <a:lnTo>
-                    <a:pt x="3151391" y="2547999"/>
-                  </a:lnTo>
-                  <a:lnTo>
-                    <a:pt x="3223013" y="2578032"/>
-                  </a:lnTo>
-                  <a:lnTo>
-                    <a:pt x="3294636" y="2607101"/>
-                  </a:lnTo>
-                  <a:lnTo>
-                    <a:pt x="3366258" y="2635237"/>
-                  </a:lnTo>
-                  <a:lnTo>
-                    <a:pt x="3437881" y="2657416"/>
-                  </a:lnTo>
-                  <a:lnTo>
-                    <a:pt x="3509503" y="2667638"/>
-                  </a:lnTo>
-                  <a:lnTo>
-                    <a:pt x="3581126" y="2677733"/>
-                  </a:lnTo>
-                  <a:lnTo>
-                    <a:pt x="3652748" y="2687703"/>
-                  </a:lnTo>
-                  <a:lnTo>
-                    <a:pt x="3724371" y="2697550"/>
-                  </a:lnTo>
-                  <a:lnTo>
-                    <a:pt x="3795993" y="2707275"/>
-                  </a:lnTo>
-                  <a:lnTo>
-                    <a:pt x="3867616" y="2716880"/>
-                  </a:lnTo>
-                  <a:lnTo>
-                    <a:pt x="3939238" y="2726365"/>
-                  </a:lnTo>
-                  <a:lnTo>
-                    <a:pt x="4010861" y="2735734"/>
-                  </a:lnTo>
-                  <a:lnTo>
-                    <a:pt x="4082483" y="2744987"/>
-                  </a:lnTo>
-                  <a:lnTo>
-                    <a:pt x="4154106" y="2754125"/>
-                  </a:lnTo>
-                  <a:lnTo>
-                    <a:pt x="4225729" y="2763150"/>
-                  </a:lnTo>
-                  <a:lnTo>
-                    <a:pt x="4297351" y="2772064"/>
-                  </a:lnTo>
-                  <a:lnTo>
-                    <a:pt x="4368974" y="2780867"/>
-                  </a:lnTo>
-                  <a:lnTo>
-                    <a:pt x="4440596" y="2789561"/>
-                  </a:lnTo>
-                  <a:lnTo>
-                    <a:pt x="4512219" y="2798148"/>
-                  </a:lnTo>
-                  <a:lnTo>
-                    <a:pt x="4583841" y="2806629"/>
-                  </a:lnTo>
-                  <a:lnTo>
-                    <a:pt x="4655464" y="2815005"/>
-                  </a:lnTo>
-                  <a:lnTo>
-                    <a:pt x="4727086" y="2823277"/>
-                  </a:lnTo>
-                  <a:lnTo>
-                    <a:pt x="4798709" y="2831447"/>
-                  </a:lnTo>
-                  <a:lnTo>
-                    <a:pt x="4870331" y="2839515"/>
-                  </a:lnTo>
-                  <a:lnTo>
-                    <a:pt x="4941954" y="2847484"/>
-                  </a:lnTo>
-                  <a:lnTo>
-                    <a:pt x="5013576" y="2855355"/>
-                  </a:lnTo>
-                  <a:lnTo>
-                    <a:pt x="5085199" y="2863128"/>
-                  </a:lnTo>
-                  <a:lnTo>
-                    <a:pt x="5156821" y="2870805"/>
-                  </a:lnTo>
-                  <a:lnTo>
-                    <a:pt x="5228444" y="2878387"/>
-                  </a:lnTo>
-                  <a:lnTo>
-                    <a:pt x="5300066" y="2885875"/>
-                  </a:lnTo>
-                  <a:lnTo>
-                    <a:pt x="5371689" y="2893270"/>
-                  </a:lnTo>
-                  <a:lnTo>
-                    <a:pt x="5443311" y="2900574"/>
-                  </a:lnTo>
-                  <a:lnTo>
-                    <a:pt x="5514934" y="2907788"/>
-                  </a:lnTo>
-                  <a:lnTo>
-                    <a:pt x="5586557" y="2914912"/>
-                  </a:lnTo>
-                  <a:lnTo>
-                    <a:pt x="5658179" y="2921949"/>
-                  </a:lnTo>
-                  <a:lnTo>
-                    <a:pt x="5729802" y="2928898"/>
-                  </a:lnTo>
-                  <a:lnTo>
-                    <a:pt x="5801424" y="2935761"/>
-                  </a:lnTo>
-                  <a:lnTo>
-                    <a:pt x="5873047" y="2942540"/>
-                  </a:lnTo>
-                  <a:lnTo>
-                    <a:pt x="5944669" y="2949234"/>
-                  </a:lnTo>
-                  <a:lnTo>
-                    <a:pt x="6016292" y="2955846"/>
-                  </a:lnTo>
-                  <a:lnTo>
-                    <a:pt x="6087914" y="2962376"/>
-                  </a:lnTo>
-                  <a:lnTo>
-                    <a:pt x="6159537" y="2968825"/>
-                  </a:lnTo>
-                  <a:lnTo>
-                    <a:pt x="6231159" y="2975195"/>
-                  </a:lnTo>
-                  <a:lnTo>
-                    <a:pt x="6302782" y="2981485"/>
-                  </a:lnTo>
-                  <a:lnTo>
-                    <a:pt x="6374404" y="2987698"/>
-                  </a:lnTo>
-                  <a:lnTo>
-                    <a:pt x="6446027" y="2993834"/>
-                  </a:lnTo>
-                  <a:lnTo>
-                    <a:pt x="6517649" y="2999894"/>
-                  </a:lnTo>
-                  <a:lnTo>
-                    <a:pt x="6589272" y="3005879"/>
-                  </a:lnTo>
-                  <a:lnTo>
-                    <a:pt x="6660894" y="3011790"/>
-                  </a:lnTo>
-                  <a:lnTo>
-                    <a:pt x="6732517" y="3017628"/>
-                  </a:lnTo>
-                  <a:lnTo>
-                    <a:pt x="6804139" y="3023394"/>
-                  </a:lnTo>
-                  <a:lnTo>
-                    <a:pt x="6875762" y="3029088"/>
-                  </a:lnTo>
-                  <a:lnTo>
-                    <a:pt x="6947385" y="3034712"/>
-                  </a:lnTo>
-                  <a:lnTo>
-                    <a:pt x="7019007" y="3040267"/>
-                  </a:lnTo>
-                  <a:lnTo>
-                    <a:pt x="7090630" y="3045752"/>
-                  </a:lnTo>
-                  <a:lnTo>
-                    <a:pt x="7090630" y="3328167"/>
-                  </a:lnTo>
-                  <a:lnTo>
-                    <a:pt x="7019007" y="3323008"/>
-                  </a:lnTo>
-                  <a:lnTo>
-                    <a:pt x="6947385" y="3317678"/>
-                  </a:lnTo>
-                  <a:lnTo>
-                    <a:pt x="6875762" y="3312171"/>
-                  </a:lnTo>
-                  <a:lnTo>
-                    <a:pt x="6804139" y="3306481"/>
-                  </a:lnTo>
-                  <a:lnTo>
-                    <a:pt x="6732517" y="3300603"/>
-                  </a:lnTo>
-                  <a:lnTo>
-                    <a:pt x="6660894" y="3294531"/>
-                  </a:lnTo>
-                  <a:lnTo>
-                    <a:pt x="6589272" y="3288256"/>
-                  </a:lnTo>
-                  <a:lnTo>
-                    <a:pt x="6517649" y="3281774"/>
-                  </a:lnTo>
-                  <a:lnTo>
-                    <a:pt x="6446027" y="3275077"/>
-                  </a:lnTo>
-                  <a:lnTo>
-                    <a:pt x="6374404" y="3268157"/>
-                  </a:lnTo>
-                  <a:lnTo>
-                    <a:pt x="6302782" y="3261008"/>
-                  </a:lnTo>
-                  <a:lnTo>
-                    <a:pt x="6231159" y="3253622"/>
-                  </a:lnTo>
-                  <a:lnTo>
-                    <a:pt x="6159537" y="3245992"/>
-                  </a:lnTo>
-                  <a:lnTo>
-                    <a:pt x="6087914" y="3238108"/>
-                  </a:lnTo>
-                  <a:lnTo>
-                    <a:pt x="6016292" y="3229963"/>
-                  </a:lnTo>
-                  <a:lnTo>
-                    <a:pt x="5944669" y="3221547"/>
-                  </a:lnTo>
-                  <a:lnTo>
-                    <a:pt x="5873047" y="3212853"/>
-                  </a:lnTo>
-                  <a:lnTo>
-                    <a:pt x="5801424" y="3203870"/>
-                  </a:lnTo>
-                  <a:lnTo>
-                    <a:pt x="5729802" y="3194590"/>
-                  </a:lnTo>
-                  <a:lnTo>
-                    <a:pt x="5658179" y="3185001"/>
-                  </a:lnTo>
-                  <a:lnTo>
-                    <a:pt x="5586557" y="3175095"/>
-                  </a:lnTo>
-                  <a:lnTo>
-                    <a:pt x="5514934" y="3164860"/>
-                  </a:lnTo>
-                  <a:lnTo>
-                    <a:pt x="5443311" y="3154286"/>
-                  </a:lnTo>
-                  <a:lnTo>
-                    <a:pt x="5371689" y="3143362"/>
-                  </a:lnTo>
-                  <a:lnTo>
-                    <a:pt x="5300066" y="3132075"/>
-                  </a:lnTo>
-                  <a:lnTo>
-                    <a:pt x="5228444" y="3120413"/>
-                  </a:lnTo>
-                  <a:lnTo>
-                    <a:pt x="5156821" y="3108365"/>
-                  </a:lnTo>
-                  <a:lnTo>
-                    <a:pt x="5085199" y="3095918"/>
-                  </a:lnTo>
-                  <a:lnTo>
-                    <a:pt x="5013576" y="3083058"/>
-                  </a:lnTo>
-                  <a:lnTo>
-                    <a:pt x="4941954" y="3069771"/>
-                  </a:lnTo>
-                  <a:lnTo>
-                    <a:pt x="4870331" y="3056044"/>
-                  </a:lnTo>
-                  <a:lnTo>
-                    <a:pt x="4798709" y="3041861"/>
-                  </a:lnTo>
-                  <a:lnTo>
-                    <a:pt x="4727086" y="3027209"/>
-                  </a:lnTo>
-                  <a:lnTo>
-                    <a:pt x="4655464" y="3012070"/>
-                  </a:lnTo>
-                  <a:lnTo>
-                    <a:pt x="4583841" y="2996430"/>
-                  </a:lnTo>
-                  <a:lnTo>
-                    <a:pt x="4512219" y="2980270"/>
-                  </a:lnTo>
-                  <a:lnTo>
-                    <a:pt x="4440596" y="2963575"/>
-                  </a:lnTo>
-                  <a:lnTo>
-                    <a:pt x="4368974" y="2946327"/>
-                  </a:lnTo>
-                  <a:lnTo>
-                    <a:pt x="4297351" y="2928506"/>
-                  </a:lnTo>
-                  <a:lnTo>
-                    <a:pt x="4225729" y="2910095"/>
-                  </a:lnTo>
-                  <a:lnTo>
-                    <a:pt x="4154106" y="2891073"/>
-                  </a:lnTo>
-                  <a:lnTo>
-                    <a:pt x="4082483" y="2871420"/>
-                  </a:lnTo>
-                  <a:lnTo>
-                    <a:pt x="4010861" y="2851116"/>
-                  </a:lnTo>
-                  <a:lnTo>
-                    <a:pt x="3939238" y="2830138"/>
-                  </a:lnTo>
-                  <a:lnTo>
-                    <a:pt x="3867616" y="2808465"/>
-                  </a:lnTo>
-                  <a:lnTo>
-                    <a:pt x="3795993" y="2786073"/>
-                  </a:lnTo>
-                  <a:lnTo>
-                    <a:pt x="3724371" y="2762938"/>
-                  </a:lnTo>
-                  <a:lnTo>
-                    <a:pt x="3652748" y="2739036"/>
-                  </a:lnTo>
-                  <a:lnTo>
-                    <a:pt x="3581126" y="2714342"/>
-                  </a:lnTo>
-                  <a:lnTo>
-                    <a:pt x="3509503" y="2688829"/>
-                  </a:lnTo>
-                  <a:lnTo>
-                    <a:pt x="3437881" y="2662470"/>
-                  </a:lnTo>
-                  <a:lnTo>
-                    <a:pt x="3366258" y="2647067"/>
-                  </a:lnTo>
-                  <a:lnTo>
-                    <a:pt x="3294636" y="2636588"/>
-                  </a:lnTo>
-                  <a:lnTo>
-                    <a:pt x="3223013" y="2625977"/>
-                  </a:lnTo>
-                  <a:lnTo>
-                    <a:pt x="3151391" y="2615234"/>
-                  </a:lnTo>
-                  <a:lnTo>
-                    <a:pt x="3079768" y="2604356"/>
-                  </a:lnTo>
-                  <a:lnTo>
-                    <a:pt x="3008146" y="2593342"/>
-                  </a:lnTo>
-                  <a:lnTo>
-                    <a:pt x="2936523" y="2582190"/>
-                  </a:lnTo>
-                  <a:lnTo>
-                    <a:pt x="2864901" y="2570899"/>
-                  </a:lnTo>
-                  <a:lnTo>
-                    <a:pt x="2793278" y="2559466"/>
-                  </a:lnTo>
-                  <a:lnTo>
-                    <a:pt x="2721655" y="2547889"/>
-                  </a:lnTo>
-                  <a:lnTo>
-                    <a:pt x="2650033" y="2536168"/>
-                  </a:lnTo>
-                  <a:lnTo>
-                    <a:pt x="2578410" y="2524300"/>
-                  </a:lnTo>
-                  <a:lnTo>
-                    <a:pt x="2506788" y="2512283"/>
-                  </a:lnTo>
-                  <a:lnTo>
-                    <a:pt x="2435165" y="2500116"/>
-                  </a:lnTo>
-                  <a:lnTo>
-                    <a:pt x="2363543" y="2487796"/>
-                  </a:lnTo>
-                  <a:lnTo>
-                    <a:pt x="2291920" y="2475322"/>
-                  </a:lnTo>
-                  <a:lnTo>
-                    <a:pt x="2220298" y="2462692"/>
-                  </a:lnTo>
-                  <a:lnTo>
-                    <a:pt x="2148675" y="2449904"/>
-                  </a:lnTo>
-                  <a:lnTo>
-                    <a:pt x="2077053" y="2436956"/>
-                  </a:lnTo>
-                  <a:lnTo>
-                    <a:pt x="2005430" y="2423845"/>
-                  </a:lnTo>
-                  <a:lnTo>
-                    <a:pt x="1933808" y="2410570"/>
-                  </a:lnTo>
-                  <a:lnTo>
-                    <a:pt x="1862185" y="2397129"/>
-                  </a:lnTo>
-                  <a:lnTo>
-                    <a:pt x="1790563" y="2383519"/>
-                  </a:lnTo>
-                  <a:lnTo>
-                    <a:pt x="1718940" y="2369739"/>
-                  </a:lnTo>
-                  <a:lnTo>
-                    <a:pt x="1647318" y="2355787"/>
-                  </a:lnTo>
-                  <a:lnTo>
-                    <a:pt x="1575695" y="2341660"/>
-                  </a:lnTo>
-                  <a:lnTo>
-                    <a:pt x="1504073" y="2327355"/>
-                  </a:lnTo>
-                  <a:lnTo>
-                    <a:pt x="1432450" y="2312872"/>
-                  </a:lnTo>
-                  <a:lnTo>
-                    <a:pt x="1360827" y="2298207"/>
-                  </a:lnTo>
-                  <a:lnTo>
-                    <a:pt x="1289205" y="2283359"/>
-                  </a:lnTo>
-                  <a:lnTo>
-                    <a:pt x="1217582" y="2268324"/>
-                  </a:lnTo>
-                  <a:lnTo>
-                    <a:pt x="1145960" y="2253102"/>
-                  </a:lnTo>
-                  <a:lnTo>
-                    <a:pt x="1074337" y="2237688"/>
-                  </a:lnTo>
-                  <a:lnTo>
-                    <a:pt x="1002715" y="2222082"/>
-                  </a:lnTo>
-                  <a:lnTo>
-                    <a:pt x="931092" y="2206280"/>
-                  </a:lnTo>
-                  <a:lnTo>
-                    <a:pt x="859470" y="2190280"/>
-                  </a:lnTo>
-                  <a:lnTo>
-                    <a:pt x="787847" y="2174080"/>
-                  </a:lnTo>
-                  <a:lnTo>
-                    <a:pt x="716225" y="2157677"/>
-                  </a:lnTo>
-                  <a:lnTo>
-                    <a:pt x="644602" y="2141068"/>
-                  </a:lnTo>
-                  <a:lnTo>
-                    <a:pt x="572980" y="2124252"/>
-                  </a:lnTo>
-                  <a:lnTo>
-                    <a:pt x="501357" y="2107225"/>
-                  </a:lnTo>
-                  <a:lnTo>
-                    <a:pt x="429735" y="2089984"/>
-                  </a:lnTo>
-                  <a:lnTo>
-                    <a:pt x="358112" y="2072528"/>
-                  </a:lnTo>
-                  <a:lnTo>
-                    <a:pt x="286490" y="2054853"/>
-                  </a:lnTo>
-                  <a:lnTo>
-                    <a:pt x="214867" y="2036956"/>
-                  </a:lnTo>
-                  <a:lnTo>
-                    <a:pt x="143245" y="2018836"/>
-                  </a:lnTo>
-                  <a:lnTo>
-                    <a:pt x="71622" y="2000489"/>
-                  </a:lnTo>
-                  <a:lnTo>
-                    <a:pt x="0" y="1981911"/>
+                    <a:pt x="286490" y="19886"/>
+                  </a:lnTo>
+                  <a:lnTo>
+                    <a:pt x="358112" y="131361"/>
+                  </a:lnTo>
+                  <a:lnTo>
+                    <a:pt x="429735" y="239248"/>
+                  </a:lnTo>
+                  <a:lnTo>
+                    <a:pt x="501357" y="343664"/>
+                  </a:lnTo>
+                  <a:lnTo>
+                    <a:pt x="572980" y="444719"/>
+                  </a:lnTo>
+                  <a:lnTo>
+                    <a:pt x="644602" y="542522"/>
+                  </a:lnTo>
+                  <a:lnTo>
+                    <a:pt x="716225" y="637177"/>
+                  </a:lnTo>
+                  <a:lnTo>
+                    <a:pt x="787847" y="728786"/>
+                  </a:lnTo>
+                  <a:lnTo>
+                    <a:pt x="859470" y="817447"/>
+                  </a:lnTo>
+                  <a:lnTo>
+                    <a:pt x="931092" y="903255"/>
+                  </a:lnTo>
+                  <a:lnTo>
+                    <a:pt x="1002715" y="986301"/>
+                  </a:lnTo>
+                  <a:lnTo>
+                    <a:pt x="1074337" y="1066674"/>
+                  </a:lnTo>
+                  <a:lnTo>
+                    <a:pt x="1145960" y="1144461"/>
+                  </a:lnTo>
+                  <a:lnTo>
+                    <a:pt x="1217582" y="1219745"/>
+                  </a:lnTo>
+                  <a:lnTo>
+                    <a:pt x="1289205" y="1292605"/>
+                  </a:lnTo>
+                  <a:lnTo>
+                    <a:pt x="1360827" y="1363121"/>
+                  </a:lnTo>
+                  <a:lnTo>
+                    <a:pt x="1432450" y="1431368"/>
+                  </a:lnTo>
+                  <a:lnTo>
+                    <a:pt x="1504073" y="1497418"/>
+                  </a:lnTo>
+                  <a:lnTo>
+                    <a:pt x="1575695" y="1561343"/>
+                  </a:lnTo>
+                  <a:lnTo>
+                    <a:pt x="1647318" y="1623210"/>
+                  </a:lnTo>
+                  <a:lnTo>
+                    <a:pt x="1718940" y="1683086"/>
+                  </a:lnTo>
+                  <a:lnTo>
+                    <a:pt x="1790563" y="1741036"/>
+                  </a:lnTo>
+                  <a:lnTo>
+                    <a:pt x="1862185" y="1797120"/>
+                  </a:lnTo>
+                  <a:lnTo>
+                    <a:pt x="1933808" y="1851400"/>
+                  </a:lnTo>
+                  <a:lnTo>
+                    <a:pt x="2005430" y="1903932"/>
+                  </a:lnTo>
+                  <a:lnTo>
+                    <a:pt x="2077053" y="1954774"/>
+                  </a:lnTo>
+                  <a:lnTo>
+                    <a:pt x="2148675" y="2003980"/>
+                  </a:lnTo>
+                  <a:lnTo>
+                    <a:pt x="2220298" y="2051602"/>
+                  </a:lnTo>
+                  <a:lnTo>
+                    <a:pt x="2291920" y="2097692"/>
+                  </a:lnTo>
+                  <a:lnTo>
+                    <a:pt x="2363543" y="2142298"/>
+                  </a:lnTo>
+                  <a:lnTo>
+                    <a:pt x="2435165" y="2185469"/>
+                  </a:lnTo>
+                  <a:lnTo>
+                    <a:pt x="2506788" y="2227251"/>
+                  </a:lnTo>
+                  <a:lnTo>
+                    <a:pt x="2578410" y="2267688"/>
+                  </a:lnTo>
+                  <a:lnTo>
+                    <a:pt x="2650033" y="2306823"/>
+                  </a:lnTo>
+                  <a:lnTo>
+                    <a:pt x="2721655" y="2344699"/>
+                  </a:lnTo>
+                  <a:lnTo>
+                    <a:pt x="2793278" y="2381356"/>
+                  </a:lnTo>
+                  <a:lnTo>
+                    <a:pt x="2864901" y="2416834"/>
+                  </a:lnTo>
+                  <a:lnTo>
+                    <a:pt x="2936523" y="2451169"/>
+                  </a:lnTo>
+                  <a:lnTo>
+                    <a:pt x="3008146" y="2484400"/>
+                  </a:lnTo>
+                  <a:lnTo>
+                    <a:pt x="3079768" y="2516561"/>
+                  </a:lnTo>
+                  <a:lnTo>
+                    <a:pt x="3151391" y="2547688"/>
+                  </a:lnTo>
+                  <a:lnTo>
+                    <a:pt x="3223013" y="2577812"/>
+                  </a:lnTo>
+                  <a:lnTo>
+                    <a:pt x="3294636" y="2606967"/>
+                  </a:lnTo>
+                  <a:lnTo>
+                    <a:pt x="3366258" y="2635184"/>
+                  </a:lnTo>
+                  <a:lnTo>
+                    <a:pt x="3437881" y="2657428"/>
+                  </a:lnTo>
+                  <a:lnTo>
+                    <a:pt x="3509503" y="2667687"/>
+                  </a:lnTo>
+                  <a:lnTo>
+                    <a:pt x="3581126" y="2677818"/>
+                  </a:lnTo>
+                  <a:lnTo>
+                    <a:pt x="3652748" y="2687824"/>
+                  </a:lnTo>
+                  <a:lnTo>
+                    <a:pt x="3724371" y="2697705"/>
+                  </a:lnTo>
+                  <a:lnTo>
+                    <a:pt x="3795993" y="2707464"/>
+                  </a:lnTo>
+                  <a:lnTo>
+                    <a:pt x="3867616" y="2717101"/>
+                  </a:lnTo>
+                  <a:lnTo>
+                    <a:pt x="3939238" y="2726619"/>
+                  </a:lnTo>
+                  <a:lnTo>
+                    <a:pt x="4010861" y="2736019"/>
+                  </a:lnTo>
+                  <a:lnTo>
+                    <a:pt x="4082483" y="2745302"/>
+                  </a:lnTo>
+                  <a:lnTo>
+                    <a:pt x="4154106" y="2754470"/>
+                  </a:lnTo>
+                  <a:lnTo>
+                    <a:pt x="4225729" y="2763524"/>
+                  </a:lnTo>
+                  <a:lnTo>
+                    <a:pt x="4297351" y="2772466"/>
+                  </a:lnTo>
+                  <a:lnTo>
+                    <a:pt x="4368974" y="2781296"/>
+                  </a:lnTo>
+                  <a:lnTo>
+                    <a:pt x="4440596" y="2790017"/>
+                  </a:lnTo>
+                  <a:lnTo>
+                    <a:pt x="4512219" y="2798630"/>
+                  </a:lnTo>
+                  <a:lnTo>
+                    <a:pt x="4583841" y="2807135"/>
+                  </a:lnTo>
+                  <a:lnTo>
+                    <a:pt x="4655464" y="2815536"/>
+                  </a:lnTo>
+                  <a:lnTo>
+                    <a:pt x="4727086" y="2823831"/>
+                  </a:lnTo>
+                  <a:lnTo>
+                    <a:pt x="4798709" y="2832024"/>
+                  </a:lnTo>
+                  <a:lnTo>
+                    <a:pt x="4870331" y="2840116"/>
+                  </a:lnTo>
+                  <a:lnTo>
+                    <a:pt x="4941954" y="2848106"/>
+                  </a:lnTo>
+                  <a:lnTo>
+                    <a:pt x="5013576" y="2855998"/>
+                  </a:lnTo>
+                  <a:lnTo>
+                    <a:pt x="5085199" y="2863791"/>
+                  </a:lnTo>
+                  <a:lnTo>
+                    <a:pt x="5156821" y="2871488"/>
+                  </a:lnTo>
+                  <a:lnTo>
+                    <a:pt x="5228444" y="2879089"/>
+                  </a:lnTo>
+                  <a:lnTo>
+                    <a:pt x="5300066" y="2886596"/>
+                  </a:lnTo>
+                  <a:lnTo>
+                    <a:pt x="5371689" y="2894010"/>
+                  </a:lnTo>
+                  <a:lnTo>
+                    <a:pt x="5443311" y="2901331"/>
+                  </a:lnTo>
+                  <a:lnTo>
+                    <a:pt x="5514934" y="2908562"/>
+                  </a:lnTo>
+                  <a:lnTo>
+                    <a:pt x="5586557" y="2915703"/>
+                  </a:lnTo>
+                  <a:lnTo>
+                    <a:pt x="5658179" y="2922755"/>
+                  </a:lnTo>
+                  <a:lnTo>
+                    <a:pt x="5729802" y="2929720"/>
+                  </a:lnTo>
+                  <a:lnTo>
+                    <a:pt x="5801424" y="2936598"/>
+                  </a:lnTo>
+                  <a:lnTo>
+                    <a:pt x="5873047" y="2943391"/>
+                  </a:lnTo>
+                  <a:lnTo>
+                    <a:pt x="5944669" y="2950100"/>
+                  </a:lnTo>
+                  <a:lnTo>
+                    <a:pt x="6016292" y="2956725"/>
+                  </a:lnTo>
+                  <a:lnTo>
+                    <a:pt x="6087914" y="2963268"/>
+                  </a:lnTo>
+                  <a:lnTo>
+                    <a:pt x="6159537" y="2969730"/>
+                  </a:lnTo>
+                  <a:lnTo>
+                    <a:pt x="6231159" y="2976111"/>
+                  </a:lnTo>
+                  <a:lnTo>
+                    <a:pt x="6302782" y="2982413"/>
+                  </a:lnTo>
+                  <a:lnTo>
+                    <a:pt x="6374404" y="2988638"/>
+                  </a:lnTo>
+                  <a:lnTo>
+                    <a:pt x="6446027" y="2994784"/>
+                  </a:lnTo>
+                  <a:lnTo>
+                    <a:pt x="6517649" y="3000855"/>
+                  </a:lnTo>
+                  <a:lnTo>
+                    <a:pt x="6589272" y="3006850"/>
+                  </a:lnTo>
+                  <a:lnTo>
+                    <a:pt x="6660894" y="3012771"/>
+                  </a:lnTo>
+                  <a:lnTo>
+                    <a:pt x="6732517" y="3018618"/>
+                  </a:lnTo>
+                  <a:lnTo>
+                    <a:pt x="6804139" y="3024392"/>
+                  </a:lnTo>
+                  <a:lnTo>
+                    <a:pt x="6875762" y="3030095"/>
+                  </a:lnTo>
+                  <a:lnTo>
+                    <a:pt x="6947385" y="3035727"/>
+                  </a:lnTo>
+                  <a:lnTo>
+                    <a:pt x="7019007" y="3041290"/>
+                  </a:lnTo>
+                  <a:lnTo>
+                    <a:pt x="7090630" y="3046783"/>
+                  </a:lnTo>
+                  <a:lnTo>
+                    <a:pt x="7090630" y="3328883"/>
+                  </a:lnTo>
+                  <a:lnTo>
+                    <a:pt x="7019007" y="3323733"/>
+                  </a:lnTo>
+                  <a:lnTo>
+                    <a:pt x="6947385" y="3318412"/>
+                  </a:lnTo>
+                  <a:lnTo>
+                    <a:pt x="6875762" y="3312915"/>
+                  </a:lnTo>
+                  <a:lnTo>
+                    <a:pt x="6804139" y="3307234"/>
+                  </a:lnTo>
+                  <a:lnTo>
+                    <a:pt x="6732517" y="3301365"/>
+                  </a:lnTo>
+                  <a:lnTo>
+                    <a:pt x="6660894" y="3295300"/>
+                  </a:lnTo>
+                  <a:lnTo>
+                    <a:pt x="6589272" y="3289034"/>
+                  </a:lnTo>
+                  <a:lnTo>
+                    <a:pt x="6517649" y="3282559"/>
+                  </a:lnTo>
+                  <a:lnTo>
+                    <a:pt x="6446027" y="3275869"/>
+                  </a:lnTo>
+                  <a:lnTo>
+                    <a:pt x="6374404" y="3268957"/>
+                  </a:lnTo>
+                  <a:lnTo>
+                    <a:pt x="6302782" y="3261814"/>
+                  </a:lnTo>
+                  <a:lnTo>
+                    <a:pt x="6231159" y="3254434"/>
+                  </a:lnTo>
+                  <a:lnTo>
+                    <a:pt x="6159537" y="3246809"/>
+                  </a:lnTo>
+                  <a:lnTo>
+                    <a:pt x="6087914" y="3238931"/>
+                  </a:lnTo>
+                  <a:lnTo>
+                    <a:pt x="6016292" y="3230790"/>
+                  </a:lnTo>
+                  <a:lnTo>
+                    <a:pt x="5944669" y="3222378"/>
+                  </a:lnTo>
+                  <a:lnTo>
+                    <a:pt x="5873047" y="3213687"/>
+                  </a:lnTo>
+                  <a:lnTo>
+                    <a:pt x="5801424" y="3204707"/>
+                  </a:lnTo>
+                  <a:lnTo>
+                    <a:pt x="5729802" y="3195428"/>
+                  </a:lnTo>
+                  <a:lnTo>
+                    <a:pt x="5658179" y="3185841"/>
+                  </a:lnTo>
+                  <a:lnTo>
+                    <a:pt x="5586557" y="3175935"/>
+                  </a:lnTo>
+                  <a:lnTo>
+                    <a:pt x="5514934" y="3165700"/>
+                  </a:lnTo>
+                  <a:lnTo>
+                    <a:pt x="5443311" y="3155124"/>
+                  </a:lnTo>
+                  <a:lnTo>
+                    <a:pt x="5371689" y="3144196"/>
+                  </a:lnTo>
+                  <a:lnTo>
+                    <a:pt x="5300066" y="3132906"/>
+                  </a:lnTo>
+                  <a:lnTo>
+                    <a:pt x="5228444" y="3121239"/>
+                  </a:lnTo>
+                  <a:lnTo>
+                    <a:pt x="5156821" y="3109185"/>
+                  </a:lnTo>
+                  <a:lnTo>
+                    <a:pt x="5085199" y="3096730"/>
+                  </a:lnTo>
+                  <a:lnTo>
+                    <a:pt x="5013576" y="3083861"/>
+                  </a:lnTo>
+                  <a:lnTo>
+                    <a:pt x="4941954" y="3070563"/>
+                  </a:lnTo>
+                  <a:lnTo>
+                    <a:pt x="4870331" y="3056824"/>
+                  </a:lnTo>
+                  <a:lnTo>
+                    <a:pt x="4798709" y="3042628"/>
+                  </a:lnTo>
+                  <a:lnTo>
+                    <a:pt x="4727086" y="3027960"/>
+                  </a:lnTo>
+                  <a:lnTo>
+                    <a:pt x="4655464" y="3012804"/>
+                  </a:lnTo>
+                  <a:lnTo>
+                    <a:pt x="4583841" y="2997144"/>
+                  </a:lnTo>
+                  <a:lnTo>
+                    <a:pt x="4512219" y="2980963"/>
+                  </a:lnTo>
+                  <a:lnTo>
+                    <a:pt x="4440596" y="2964244"/>
+                  </a:lnTo>
+                  <a:lnTo>
+                    <a:pt x="4368974" y="2946970"/>
+                  </a:lnTo>
+                  <a:lnTo>
+                    <a:pt x="4297351" y="2929120"/>
+                  </a:lnTo>
+                  <a:lnTo>
+                    <a:pt x="4225729" y="2910678"/>
+                  </a:lnTo>
+                  <a:lnTo>
+                    <a:pt x="4154106" y="2891622"/>
+                  </a:lnTo>
+                  <a:lnTo>
+                    <a:pt x="4082483" y="2871932"/>
+                  </a:lnTo>
+                  <a:lnTo>
+                    <a:pt x="4010861" y="2851588"/>
+                  </a:lnTo>
+                  <a:lnTo>
+                    <a:pt x="3939238" y="2830567"/>
+                  </a:lnTo>
+                  <a:lnTo>
+                    <a:pt x="3867616" y="2808847"/>
+                  </a:lnTo>
+                  <a:lnTo>
+                    <a:pt x="3795993" y="2786405"/>
+                  </a:lnTo>
+                  <a:lnTo>
+                    <a:pt x="3724371" y="2763217"/>
+                  </a:lnTo>
+                  <a:lnTo>
+                    <a:pt x="3652748" y="2739258"/>
+                  </a:lnTo>
+                  <a:lnTo>
+                    <a:pt x="3581126" y="2714502"/>
+                  </a:lnTo>
+                  <a:lnTo>
+                    <a:pt x="3509503" y="2688922"/>
+                  </a:lnTo>
+                  <a:lnTo>
+                    <a:pt x="3437881" y="2662493"/>
+                  </a:lnTo>
+                  <a:lnTo>
+                    <a:pt x="3366258" y="2647040"/>
+                  </a:lnTo>
+                  <a:lnTo>
+                    <a:pt x="3294636" y="2636522"/>
+                  </a:lnTo>
+                  <a:lnTo>
+                    <a:pt x="3223013" y="2625871"/>
+                  </a:lnTo>
+                  <a:lnTo>
+                    <a:pt x="3151391" y="2615087"/>
+                  </a:lnTo>
+                  <a:lnTo>
+                    <a:pt x="3079768" y="2604167"/>
+                  </a:lnTo>
+                  <a:lnTo>
+                    <a:pt x="3008146" y="2593109"/>
+                  </a:lnTo>
+                  <a:lnTo>
+                    <a:pt x="2936523" y="2581913"/>
+                  </a:lnTo>
+                  <a:lnTo>
+                    <a:pt x="2864901" y="2570576"/>
+                  </a:lnTo>
+                  <a:lnTo>
+                    <a:pt x="2793278" y="2559097"/>
+                  </a:lnTo>
+                  <a:lnTo>
+                    <a:pt x="2721655" y="2547473"/>
+                  </a:lnTo>
+                  <a:lnTo>
+                    <a:pt x="2650033" y="2535703"/>
+                  </a:lnTo>
+                  <a:lnTo>
+                    <a:pt x="2578410" y="2523785"/>
+                  </a:lnTo>
+                  <a:lnTo>
+                    <a:pt x="2506788" y="2511717"/>
+                  </a:lnTo>
+                  <a:lnTo>
+                    <a:pt x="2435165" y="2499497"/>
+                  </a:lnTo>
+                  <a:lnTo>
+                    <a:pt x="2363543" y="2487124"/>
+                  </a:lnTo>
+                  <a:lnTo>
+                    <a:pt x="2291920" y="2474596"/>
+                  </a:lnTo>
+                  <a:lnTo>
+                    <a:pt x="2220298" y="2461910"/>
+                  </a:lnTo>
+                  <a:lnTo>
+                    <a:pt x="2148675" y="2449064"/>
+                  </a:lnTo>
+                  <a:lnTo>
+                    <a:pt x="2077053" y="2436057"/>
+                  </a:lnTo>
+                  <a:lnTo>
+                    <a:pt x="2005430" y="2422886"/>
+                  </a:lnTo>
+                  <a:lnTo>
+                    <a:pt x="1933808" y="2409550"/>
+                  </a:lnTo>
+                  <a:lnTo>
+                    <a:pt x="1862185" y="2396046"/>
+                  </a:lnTo>
+                  <a:lnTo>
+                    <a:pt x="1790563" y="2382373"/>
+                  </a:lnTo>
+                  <a:lnTo>
+                    <a:pt x="1718940" y="2368527"/>
+                  </a:lnTo>
+                  <a:lnTo>
+                    <a:pt x="1647318" y="2354508"/>
+                  </a:lnTo>
+                  <a:lnTo>
+                    <a:pt x="1575695" y="2340312"/>
+                  </a:lnTo>
+                  <a:lnTo>
+                    <a:pt x="1504073" y="2325938"/>
+                  </a:lnTo>
+                  <a:lnTo>
+                    <a:pt x="1432450" y="2311383"/>
+                  </a:lnTo>
+                  <a:lnTo>
+                    <a:pt x="1360827" y="2296645"/>
+                  </a:lnTo>
+                  <a:lnTo>
+                    <a:pt x="1289205" y="2281722"/>
+                  </a:lnTo>
+                  <a:lnTo>
+                    <a:pt x="1217582" y="2266611"/>
+                  </a:lnTo>
+                  <a:lnTo>
+                    <a:pt x="1145960" y="2251310"/>
+                  </a:lnTo>
+                  <a:lnTo>
+                    <a:pt x="1074337" y="2235817"/>
+                  </a:lnTo>
+                  <a:lnTo>
+                    <a:pt x="1002715" y="2220129"/>
+                  </a:lnTo>
+                  <a:lnTo>
+                    <a:pt x="931092" y="2204244"/>
+                  </a:lnTo>
+                  <a:lnTo>
+                    <a:pt x="859470" y="2188159"/>
+                  </a:lnTo>
+                  <a:lnTo>
+                    <a:pt x="787847" y="2171872"/>
+                  </a:lnTo>
+                  <a:lnTo>
+                    <a:pt x="716225" y="2155381"/>
+                  </a:lnTo>
+                  <a:lnTo>
+                    <a:pt x="644602" y="2138682"/>
+                  </a:lnTo>
+                  <a:lnTo>
+                    <a:pt x="572980" y="2121773"/>
+                  </a:lnTo>
+                  <a:lnTo>
+                    <a:pt x="501357" y="2104651"/>
+                  </a:lnTo>
+                  <a:lnTo>
+                    <a:pt x="429735" y="2087314"/>
+                  </a:lnTo>
+                  <a:lnTo>
+                    <a:pt x="358112" y="2069760"/>
+                  </a:lnTo>
+                  <a:lnTo>
+                    <a:pt x="286490" y="2051984"/>
+                  </a:lnTo>
+                  <a:lnTo>
+                    <a:pt x="214867" y="2033985"/>
+                  </a:lnTo>
+                  <a:lnTo>
+                    <a:pt x="143245" y="2015760"/>
+                  </a:lnTo>
+                  <a:lnTo>
+                    <a:pt x="71622" y="1997306"/>
+                  </a:lnTo>
+                  <a:lnTo>
+                    <a:pt x="0" y="1978620"/>
                   </a:lnTo>
                   <a:close/>
                 </a:path>
@@ -4054,303 +4054,303 @@
           </p:nvSpPr>
           <p:spPr>
             <a:xfrm>
-              <a:off x="1437585" y="2073503"/>
-              <a:ext cx="6825094" cy="3045752"/>
+              <a:off x="1446173" y="2073503"/>
+              <a:ext cx="6816505" cy="3046783"/>
             </a:xfrm>
             <a:custGeom>
               <a:avLst/>
               <a:pathLst>
-                <a:path w="6825094" h="3045752">
+                <a:path w="6816505" h="3046783">
                   <a:moveTo>
                     <a:pt x="0" y="0"/>
                   </a:moveTo>
                   <a:lnTo>
-                    <a:pt x="20954" y="33472"/>
-                  </a:lnTo>
-                  <a:lnTo>
-                    <a:pt x="92576" y="144209"/>
-                  </a:lnTo>
-                  <a:lnTo>
-                    <a:pt x="164199" y="251392"/>
-                  </a:lnTo>
-                  <a:lnTo>
-                    <a:pt x="235821" y="355136"/>
-                  </a:lnTo>
-                  <a:lnTo>
-                    <a:pt x="307444" y="455549"/>
-                  </a:lnTo>
-                  <a:lnTo>
-                    <a:pt x="379066" y="552740"/>
-                  </a:lnTo>
-                  <a:lnTo>
-                    <a:pt x="450689" y="646811"/>
-                  </a:lnTo>
-                  <a:lnTo>
-                    <a:pt x="522312" y="737863"/>
-                  </a:lnTo>
-                  <a:lnTo>
-                    <a:pt x="593934" y="825993"/>
-                  </a:lnTo>
-                  <a:lnTo>
-                    <a:pt x="665557" y="911294"/>
-                  </a:lnTo>
-                  <a:lnTo>
-                    <a:pt x="737179" y="993858"/>
-                  </a:lnTo>
-                  <a:lnTo>
-                    <a:pt x="808802" y="1073771"/>
-                  </a:lnTo>
-                  <a:lnTo>
-                    <a:pt x="880424" y="1151120"/>
-                  </a:lnTo>
-                  <a:lnTo>
-                    <a:pt x="952047" y="1225986"/>
-                  </a:lnTo>
-                  <a:lnTo>
-                    <a:pt x="1023669" y="1298450"/>
-                  </a:lnTo>
-                  <a:lnTo>
-                    <a:pt x="1095292" y="1368587"/>
-                  </a:lnTo>
-                  <a:lnTo>
-                    <a:pt x="1166914" y="1436474"/>
-                  </a:lnTo>
-                  <a:lnTo>
-                    <a:pt x="1238537" y="1502181"/>
-                  </a:lnTo>
-                  <a:lnTo>
-                    <a:pt x="1310159" y="1565780"/>
-                  </a:lnTo>
-                  <a:lnTo>
-                    <a:pt x="1381782" y="1627338"/>
-                  </a:lnTo>
-                  <a:lnTo>
-                    <a:pt x="1453404" y="1686920"/>
-                  </a:lnTo>
-                  <a:lnTo>
-                    <a:pt x="1525027" y="1744589"/>
-                  </a:lnTo>
-                  <a:lnTo>
-                    <a:pt x="1596649" y="1800408"/>
-                  </a:lnTo>
-                  <a:lnTo>
-                    <a:pt x="1668272" y="1854435"/>
-                  </a:lnTo>
-                  <a:lnTo>
-                    <a:pt x="1739894" y="1906728"/>
-                  </a:lnTo>
-                  <a:lnTo>
-                    <a:pt x="1811517" y="1957343"/>
-                  </a:lnTo>
-                  <a:lnTo>
-                    <a:pt x="1883140" y="2006333"/>
-                  </a:lnTo>
-                  <a:lnTo>
-                    <a:pt x="1954762" y="2053751"/>
-                  </a:lnTo>
-                  <a:lnTo>
-                    <a:pt x="2026385" y="2099647"/>
-                  </a:lnTo>
-                  <a:lnTo>
-                    <a:pt x="2098007" y="2144070"/>
-                  </a:lnTo>
-                  <a:lnTo>
-                    <a:pt x="2169630" y="2187067"/>
-                  </a:lnTo>
-                  <a:lnTo>
-                    <a:pt x="2241252" y="2228685"/>
-                  </a:lnTo>
-                  <a:lnTo>
-                    <a:pt x="2312875" y="2268966"/>
-                  </a:lnTo>
-                  <a:lnTo>
-                    <a:pt x="2384497" y="2307955"/>
-                  </a:lnTo>
-                  <a:lnTo>
-                    <a:pt x="2456120" y="2345692"/>
-                  </a:lnTo>
-                  <a:lnTo>
-                    <a:pt x="2527742" y="2382218"/>
-                  </a:lnTo>
-                  <a:lnTo>
-                    <a:pt x="2599365" y="2417572"/>
-                  </a:lnTo>
-                  <a:lnTo>
-                    <a:pt x="2670987" y="2451791"/>
-                  </a:lnTo>
-                  <a:lnTo>
-                    <a:pt x="2742610" y="2484912"/>
-                  </a:lnTo>
-                  <a:lnTo>
-                    <a:pt x="2814232" y="2516970"/>
-                  </a:lnTo>
-                  <a:lnTo>
-                    <a:pt x="2885855" y="2547999"/>
-                  </a:lnTo>
-                  <a:lnTo>
-                    <a:pt x="2957477" y="2578032"/>
-                  </a:lnTo>
-                  <a:lnTo>
-                    <a:pt x="3029100" y="2607101"/>
-                  </a:lnTo>
-                  <a:lnTo>
-                    <a:pt x="3100722" y="2635237"/>
-                  </a:lnTo>
-                  <a:lnTo>
-                    <a:pt x="3172345" y="2657416"/>
-                  </a:lnTo>
-                  <a:lnTo>
-                    <a:pt x="3243968" y="2667638"/>
-                  </a:lnTo>
-                  <a:lnTo>
-                    <a:pt x="3315590" y="2677733"/>
-                  </a:lnTo>
-                  <a:lnTo>
-                    <a:pt x="3387213" y="2687703"/>
-                  </a:lnTo>
-                  <a:lnTo>
-                    <a:pt x="3458835" y="2697550"/>
-                  </a:lnTo>
-                  <a:lnTo>
-                    <a:pt x="3530458" y="2707275"/>
-                  </a:lnTo>
-                  <a:lnTo>
-                    <a:pt x="3602080" y="2716880"/>
-                  </a:lnTo>
-                  <a:lnTo>
-                    <a:pt x="3673703" y="2726365"/>
-                  </a:lnTo>
-                  <a:lnTo>
-                    <a:pt x="3745325" y="2735734"/>
-                  </a:lnTo>
-                  <a:lnTo>
-                    <a:pt x="3816948" y="2744987"/>
-                  </a:lnTo>
-                  <a:lnTo>
-                    <a:pt x="3888570" y="2754125"/>
-                  </a:lnTo>
-                  <a:lnTo>
-                    <a:pt x="3960193" y="2763150"/>
-                  </a:lnTo>
-                  <a:lnTo>
-                    <a:pt x="4031815" y="2772064"/>
-                  </a:lnTo>
-                  <a:lnTo>
-                    <a:pt x="4103438" y="2780867"/>
-                  </a:lnTo>
-                  <a:lnTo>
-                    <a:pt x="4175060" y="2789561"/>
-                  </a:lnTo>
-                  <a:lnTo>
-                    <a:pt x="4246683" y="2798148"/>
-                  </a:lnTo>
-                  <a:lnTo>
-                    <a:pt x="4318305" y="2806629"/>
-                  </a:lnTo>
-                  <a:lnTo>
-                    <a:pt x="4389928" y="2815005"/>
-                  </a:lnTo>
-                  <a:lnTo>
-                    <a:pt x="4461550" y="2823277"/>
-                  </a:lnTo>
-                  <a:lnTo>
-                    <a:pt x="4533173" y="2831447"/>
-                  </a:lnTo>
-                  <a:lnTo>
-                    <a:pt x="4604796" y="2839515"/>
-                  </a:lnTo>
-                  <a:lnTo>
-                    <a:pt x="4676418" y="2847484"/>
-                  </a:lnTo>
-                  <a:lnTo>
-                    <a:pt x="4748041" y="2855355"/>
-                  </a:lnTo>
-                  <a:lnTo>
-                    <a:pt x="4819663" y="2863128"/>
-                  </a:lnTo>
-                  <a:lnTo>
-                    <a:pt x="4891286" y="2870805"/>
-                  </a:lnTo>
-                  <a:lnTo>
-                    <a:pt x="4962908" y="2878387"/>
-                  </a:lnTo>
-                  <a:lnTo>
-                    <a:pt x="5034531" y="2885875"/>
-                  </a:lnTo>
-                  <a:lnTo>
-                    <a:pt x="5106153" y="2893270"/>
-                  </a:lnTo>
-                  <a:lnTo>
-                    <a:pt x="5177776" y="2900574"/>
-                  </a:lnTo>
-                  <a:lnTo>
-                    <a:pt x="5249398" y="2907788"/>
-                  </a:lnTo>
-                  <a:lnTo>
-                    <a:pt x="5321021" y="2914912"/>
-                  </a:lnTo>
-                  <a:lnTo>
-                    <a:pt x="5392643" y="2921949"/>
-                  </a:lnTo>
-                  <a:lnTo>
-                    <a:pt x="5464266" y="2928898"/>
-                  </a:lnTo>
-                  <a:lnTo>
-                    <a:pt x="5535888" y="2935761"/>
-                  </a:lnTo>
-                  <a:lnTo>
-                    <a:pt x="5607511" y="2942540"/>
-                  </a:lnTo>
-                  <a:lnTo>
-                    <a:pt x="5679133" y="2949234"/>
-                  </a:lnTo>
-                  <a:lnTo>
-                    <a:pt x="5750756" y="2955846"/>
-                  </a:lnTo>
-                  <a:lnTo>
-                    <a:pt x="5822378" y="2962376"/>
-                  </a:lnTo>
-                  <a:lnTo>
-                    <a:pt x="5894001" y="2968825"/>
-                  </a:lnTo>
-                  <a:lnTo>
-                    <a:pt x="5965624" y="2975195"/>
-                  </a:lnTo>
-                  <a:lnTo>
-                    <a:pt x="6037246" y="2981485"/>
-                  </a:lnTo>
-                  <a:lnTo>
-                    <a:pt x="6108869" y="2987698"/>
-                  </a:lnTo>
-                  <a:lnTo>
-                    <a:pt x="6180491" y="2993834"/>
-                  </a:lnTo>
-                  <a:lnTo>
-                    <a:pt x="6252114" y="2999894"/>
-                  </a:lnTo>
-                  <a:lnTo>
-                    <a:pt x="6323736" y="3005879"/>
-                  </a:lnTo>
-                  <a:lnTo>
-                    <a:pt x="6395359" y="3011790"/>
-                  </a:lnTo>
-                  <a:lnTo>
-                    <a:pt x="6466981" y="3017628"/>
-                  </a:lnTo>
-                  <a:lnTo>
-                    <a:pt x="6538604" y="3023394"/>
-                  </a:lnTo>
-                  <a:lnTo>
-                    <a:pt x="6610226" y="3029088"/>
-                  </a:lnTo>
-                  <a:lnTo>
-                    <a:pt x="6681849" y="3034712"/>
-                  </a:lnTo>
-                  <a:lnTo>
-                    <a:pt x="6753471" y="3040267"/>
-                  </a:lnTo>
-                  <a:lnTo>
-                    <a:pt x="6825094" y="3045752"/>
+                    <a:pt x="12365" y="19886"/>
+                  </a:lnTo>
+                  <a:lnTo>
+                    <a:pt x="83988" y="131361"/>
+                  </a:lnTo>
+                  <a:lnTo>
+                    <a:pt x="155611" y="239248"/>
+                  </a:lnTo>
+                  <a:lnTo>
+                    <a:pt x="227233" y="343664"/>
+                  </a:lnTo>
+                  <a:lnTo>
+                    <a:pt x="298856" y="444719"/>
+                  </a:lnTo>
+                  <a:lnTo>
+                    <a:pt x="370478" y="542522"/>
+                  </a:lnTo>
+                  <a:lnTo>
+                    <a:pt x="442101" y="637177"/>
+                  </a:lnTo>
+                  <a:lnTo>
+                    <a:pt x="513723" y="728786"/>
+                  </a:lnTo>
+                  <a:lnTo>
+                    <a:pt x="585346" y="817447"/>
+                  </a:lnTo>
+                  <a:lnTo>
+                    <a:pt x="656968" y="903255"/>
+                  </a:lnTo>
+                  <a:lnTo>
+                    <a:pt x="728591" y="986301"/>
+                  </a:lnTo>
+                  <a:lnTo>
+                    <a:pt x="800213" y="1066674"/>
+                  </a:lnTo>
+                  <a:lnTo>
+                    <a:pt x="871836" y="1144461"/>
+                  </a:lnTo>
+                  <a:lnTo>
+                    <a:pt x="943458" y="1219745"/>
+                  </a:lnTo>
+                  <a:lnTo>
+                    <a:pt x="1015081" y="1292605"/>
+                  </a:lnTo>
+                  <a:lnTo>
+                    <a:pt x="1086703" y="1363121"/>
+                  </a:lnTo>
+                  <a:lnTo>
+                    <a:pt x="1158326" y="1431368"/>
+                  </a:lnTo>
+                  <a:lnTo>
+                    <a:pt x="1229948" y="1497418"/>
+                  </a:lnTo>
+                  <a:lnTo>
+                    <a:pt x="1301571" y="1561343"/>
+                  </a:lnTo>
+                  <a:lnTo>
+                    <a:pt x="1373193" y="1623210"/>
+                  </a:lnTo>
+                  <a:lnTo>
+                    <a:pt x="1444816" y="1683086"/>
+                  </a:lnTo>
+                  <a:lnTo>
+                    <a:pt x="1516439" y="1741036"/>
+                  </a:lnTo>
+                  <a:lnTo>
+                    <a:pt x="1588061" y="1797120"/>
+                  </a:lnTo>
+                  <a:lnTo>
+                    <a:pt x="1659684" y="1851400"/>
+                  </a:lnTo>
+                  <a:lnTo>
+                    <a:pt x="1731306" y="1903932"/>
+                  </a:lnTo>
+                  <a:lnTo>
+                    <a:pt x="1802929" y="1954774"/>
+                  </a:lnTo>
+                  <a:lnTo>
+                    <a:pt x="1874551" y="2003980"/>
+                  </a:lnTo>
+                  <a:lnTo>
+                    <a:pt x="1946174" y="2051602"/>
+                  </a:lnTo>
+                  <a:lnTo>
+                    <a:pt x="2017796" y="2097692"/>
+                  </a:lnTo>
+                  <a:lnTo>
+                    <a:pt x="2089419" y="2142298"/>
+                  </a:lnTo>
+                  <a:lnTo>
+                    <a:pt x="2161041" y="2185469"/>
+                  </a:lnTo>
+                  <a:lnTo>
+                    <a:pt x="2232664" y="2227251"/>
+                  </a:lnTo>
+                  <a:lnTo>
+                    <a:pt x="2304286" y="2267688"/>
+                  </a:lnTo>
+                  <a:lnTo>
+                    <a:pt x="2375909" y="2306823"/>
+                  </a:lnTo>
+                  <a:lnTo>
+                    <a:pt x="2447531" y="2344699"/>
+                  </a:lnTo>
+                  <a:lnTo>
+                    <a:pt x="2519154" y="2381356"/>
+                  </a:lnTo>
+                  <a:lnTo>
+                    <a:pt x="2590776" y="2416834"/>
+                  </a:lnTo>
+                  <a:lnTo>
+                    <a:pt x="2662399" y="2451169"/>
+                  </a:lnTo>
+                  <a:lnTo>
+                    <a:pt x="2734021" y="2484400"/>
+                  </a:lnTo>
+                  <a:lnTo>
+                    <a:pt x="2805644" y="2516561"/>
+                  </a:lnTo>
+                  <a:lnTo>
+                    <a:pt x="2877267" y="2547688"/>
+                  </a:lnTo>
+                  <a:lnTo>
+                    <a:pt x="2948889" y="2577812"/>
+                  </a:lnTo>
+                  <a:lnTo>
+                    <a:pt x="3020512" y="2606967"/>
+                  </a:lnTo>
+                  <a:lnTo>
+                    <a:pt x="3092134" y="2635184"/>
+                  </a:lnTo>
+                  <a:lnTo>
+                    <a:pt x="3163757" y="2657428"/>
+                  </a:lnTo>
+                  <a:lnTo>
+                    <a:pt x="3235379" y="2667687"/>
+                  </a:lnTo>
+                  <a:lnTo>
+                    <a:pt x="3307002" y="2677818"/>
+                  </a:lnTo>
+                  <a:lnTo>
+                    <a:pt x="3378624" y="2687824"/>
+                  </a:lnTo>
+                  <a:lnTo>
+                    <a:pt x="3450247" y="2697705"/>
+                  </a:lnTo>
+                  <a:lnTo>
+                    <a:pt x="3521869" y="2707464"/>
+                  </a:lnTo>
+                  <a:lnTo>
+                    <a:pt x="3593492" y="2717101"/>
+                  </a:lnTo>
+                  <a:lnTo>
+                    <a:pt x="3665114" y="2726619"/>
+                  </a:lnTo>
+                  <a:lnTo>
+                    <a:pt x="3736737" y="2736019"/>
+                  </a:lnTo>
+                  <a:lnTo>
+                    <a:pt x="3808359" y="2745302"/>
+                  </a:lnTo>
+                  <a:lnTo>
+                    <a:pt x="3879982" y="2754470"/>
+                  </a:lnTo>
+                  <a:lnTo>
+                    <a:pt x="3951604" y="2763524"/>
+                  </a:lnTo>
+                  <a:lnTo>
+                    <a:pt x="4023227" y="2772466"/>
+                  </a:lnTo>
+                  <a:lnTo>
+                    <a:pt x="4094849" y="2781296"/>
+                  </a:lnTo>
+                  <a:lnTo>
+                    <a:pt x="4166472" y="2790017"/>
+                  </a:lnTo>
+                  <a:lnTo>
+                    <a:pt x="4238095" y="2798630"/>
+                  </a:lnTo>
+                  <a:lnTo>
+                    <a:pt x="4309717" y="2807135"/>
+                  </a:lnTo>
+                  <a:lnTo>
+                    <a:pt x="4381340" y="2815536"/>
+                  </a:lnTo>
+                  <a:lnTo>
+                    <a:pt x="4452962" y="2823831"/>
+                  </a:lnTo>
+                  <a:lnTo>
+                    <a:pt x="4524585" y="2832024"/>
+                  </a:lnTo>
+                  <a:lnTo>
+                    <a:pt x="4596207" y="2840116"/>
+                  </a:lnTo>
+                  <a:lnTo>
+                    <a:pt x="4667830" y="2848106"/>
+                  </a:lnTo>
+                  <a:lnTo>
+                    <a:pt x="4739452" y="2855998"/>
+                  </a:lnTo>
+                  <a:lnTo>
+                    <a:pt x="4811075" y="2863791"/>
+                  </a:lnTo>
+                  <a:lnTo>
+                    <a:pt x="4882697" y="2871488"/>
+                  </a:lnTo>
+                  <a:lnTo>
+                    <a:pt x="4954320" y="2879089"/>
+                  </a:lnTo>
+                  <a:lnTo>
+                    <a:pt x="5025942" y="2886596"/>
+                  </a:lnTo>
+                  <a:lnTo>
+                    <a:pt x="5097565" y="2894010"/>
+                  </a:lnTo>
+                  <a:lnTo>
+                    <a:pt x="5169187" y="2901331"/>
+                  </a:lnTo>
+                  <a:lnTo>
+                    <a:pt x="5240810" y="2908562"/>
+                  </a:lnTo>
+                  <a:lnTo>
+                    <a:pt x="5312432" y="2915703"/>
+                  </a:lnTo>
+                  <a:lnTo>
+                    <a:pt x="5384055" y="2922755"/>
+                  </a:lnTo>
+                  <a:lnTo>
+                    <a:pt x="5455677" y="2929720"/>
+                  </a:lnTo>
+                  <a:lnTo>
+                    <a:pt x="5527300" y="2936598"/>
+                  </a:lnTo>
+                  <a:lnTo>
+                    <a:pt x="5598922" y="2943391"/>
+                  </a:lnTo>
+                  <a:lnTo>
+                    <a:pt x="5670545" y="2950100"/>
+                  </a:lnTo>
+                  <a:lnTo>
+                    <a:pt x="5742168" y="2956725"/>
+                  </a:lnTo>
+                  <a:lnTo>
+                    <a:pt x="5813790" y="2963268"/>
+                  </a:lnTo>
+                  <a:lnTo>
+                    <a:pt x="5885413" y="2969730"/>
+                  </a:lnTo>
+                  <a:lnTo>
+                    <a:pt x="5957035" y="2976111"/>
+                  </a:lnTo>
+                  <a:lnTo>
+                    <a:pt x="6028658" y="2982413"/>
+                  </a:lnTo>
+                  <a:lnTo>
+                    <a:pt x="6100280" y="2988638"/>
+                  </a:lnTo>
+                  <a:lnTo>
+                    <a:pt x="6171903" y="2994784"/>
+                  </a:lnTo>
+                  <a:lnTo>
+                    <a:pt x="6243525" y="3000855"/>
+                  </a:lnTo>
+                  <a:lnTo>
+                    <a:pt x="6315148" y="3006850"/>
+                  </a:lnTo>
+                  <a:lnTo>
+                    <a:pt x="6386770" y="3012771"/>
+                  </a:lnTo>
+                  <a:lnTo>
+                    <a:pt x="6458393" y="3018618"/>
+                  </a:lnTo>
+                  <a:lnTo>
+                    <a:pt x="6530015" y="3024392"/>
+                  </a:lnTo>
+                  <a:lnTo>
+                    <a:pt x="6601638" y="3030095"/>
+                  </a:lnTo>
+                  <a:lnTo>
+                    <a:pt x="6673260" y="3035727"/>
+                  </a:lnTo>
+                  <a:lnTo>
+                    <a:pt x="6744883" y="3041290"/>
+                  </a:lnTo>
+                  <a:lnTo>
+                    <a:pt x="6816505" y="3046783"/>
                   </a:lnTo>
                 </a:path>
               </a:pathLst>
@@ -4370,309 +4370,309 @@
           </p:nvSpPr>
           <p:spPr>
             <a:xfrm>
-              <a:off x="1172049" y="4055414"/>
-              <a:ext cx="7090630" cy="1346255"/>
+              <a:off x="1172049" y="4052123"/>
+              <a:ext cx="7090630" cy="1350262"/>
             </a:xfrm>
             <a:custGeom>
               <a:avLst/>
               <a:pathLst>
-                <a:path w="7090630" h="1346255">
+                <a:path w="7090630" h="1350262">
                   <a:moveTo>
-                    <a:pt x="7090630" y="1346255"/>
+                    <a:pt x="7090630" y="1350262"/>
                   </a:moveTo>
                   <a:lnTo>
-                    <a:pt x="7019007" y="1341096"/>
-                  </a:lnTo>
-                  <a:lnTo>
-                    <a:pt x="6947385" y="1335766"/>
-                  </a:lnTo>
-                  <a:lnTo>
-                    <a:pt x="6875762" y="1330259"/>
-                  </a:lnTo>
-                  <a:lnTo>
-                    <a:pt x="6804139" y="1324570"/>
-                  </a:lnTo>
-                  <a:lnTo>
-                    <a:pt x="6732517" y="1318692"/>
-                  </a:lnTo>
-                  <a:lnTo>
-                    <a:pt x="6660894" y="1312619"/>
-                  </a:lnTo>
-                  <a:lnTo>
-                    <a:pt x="6589272" y="1306344"/>
-                  </a:lnTo>
-                  <a:lnTo>
-                    <a:pt x="6517649" y="1299862"/>
-                  </a:lnTo>
-                  <a:lnTo>
-                    <a:pt x="6446027" y="1293165"/>
-                  </a:lnTo>
-                  <a:lnTo>
-                    <a:pt x="6374404" y="1286245"/>
-                  </a:lnTo>
-                  <a:lnTo>
-                    <a:pt x="6302782" y="1279097"/>
-                  </a:lnTo>
-                  <a:lnTo>
-                    <a:pt x="6231159" y="1271711"/>
-                  </a:lnTo>
-                  <a:lnTo>
-                    <a:pt x="6159537" y="1264080"/>
-                  </a:lnTo>
-                  <a:lnTo>
-                    <a:pt x="6087914" y="1256196"/>
-                  </a:lnTo>
-                  <a:lnTo>
-                    <a:pt x="6016292" y="1248051"/>
-                  </a:lnTo>
-                  <a:lnTo>
-                    <a:pt x="5944669" y="1239636"/>
-                  </a:lnTo>
-                  <a:lnTo>
-                    <a:pt x="5873047" y="1230941"/>
-                  </a:lnTo>
-                  <a:lnTo>
-                    <a:pt x="5801424" y="1221958"/>
-                  </a:lnTo>
-                  <a:lnTo>
-                    <a:pt x="5729802" y="1212678"/>
-                  </a:lnTo>
-                  <a:lnTo>
-                    <a:pt x="5658179" y="1203090"/>
-                  </a:lnTo>
-                  <a:lnTo>
-                    <a:pt x="5586557" y="1193183"/>
-                  </a:lnTo>
-                  <a:lnTo>
-                    <a:pt x="5514934" y="1182949"/>
-                  </a:lnTo>
-                  <a:lnTo>
-                    <a:pt x="5443311" y="1172375"/>
-                  </a:lnTo>
-                  <a:lnTo>
-                    <a:pt x="5371689" y="1161450"/>
-                  </a:lnTo>
-                  <a:lnTo>
-                    <a:pt x="5300066" y="1150163"/>
-                  </a:lnTo>
-                  <a:lnTo>
-                    <a:pt x="5228444" y="1138502"/>
-                  </a:lnTo>
-                  <a:lnTo>
-                    <a:pt x="5156821" y="1126454"/>
-                  </a:lnTo>
-                  <a:lnTo>
-                    <a:pt x="5085199" y="1114006"/>
-                  </a:lnTo>
-                  <a:lnTo>
-                    <a:pt x="5013576" y="1101146"/>
-                  </a:lnTo>
-                  <a:lnTo>
-                    <a:pt x="4941954" y="1087859"/>
-                  </a:lnTo>
-                  <a:lnTo>
-                    <a:pt x="4870331" y="1074132"/>
-                  </a:lnTo>
-                  <a:lnTo>
-                    <a:pt x="4798709" y="1059950"/>
-                  </a:lnTo>
-                  <a:lnTo>
-                    <a:pt x="4727086" y="1045297"/>
-                  </a:lnTo>
-                  <a:lnTo>
-                    <a:pt x="4655464" y="1030158"/>
-                  </a:lnTo>
-                  <a:lnTo>
-                    <a:pt x="4583841" y="1014518"/>
-                  </a:lnTo>
-                  <a:lnTo>
-                    <a:pt x="4512219" y="998359"/>
-                  </a:lnTo>
-                  <a:lnTo>
-                    <a:pt x="4440596" y="981664"/>
-                  </a:lnTo>
-                  <a:lnTo>
-                    <a:pt x="4368974" y="964415"/>
-                  </a:lnTo>
-                  <a:lnTo>
-                    <a:pt x="4297351" y="946595"/>
-                  </a:lnTo>
-                  <a:lnTo>
-                    <a:pt x="4225729" y="928183"/>
-                  </a:lnTo>
-                  <a:lnTo>
-                    <a:pt x="4154106" y="909161"/>
-                  </a:lnTo>
-                  <a:lnTo>
-                    <a:pt x="4082483" y="889508"/>
-                  </a:lnTo>
-                  <a:lnTo>
-                    <a:pt x="4010861" y="869204"/>
-                  </a:lnTo>
-                  <a:lnTo>
-                    <a:pt x="3939238" y="848226"/>
-                  </a:lnTo>
-                  <a:lnTo>
-                    <a:pt x="3867616" y="826553"/>
-                  </a:lnTo>
-                  <a:lnTo>
-                    <a:pt x="3795993" y="804161"/>
-                  </a:lnTo>
-                  <a:lnTo>
-                    <a:pt x="3724371" y="781026"/>
-                  </a:lnTo>
-                  <a:lnTo>
-                    <a:pt x="3652748" y="757125"/>
-                  </a:lnTo>
-                  <a:lnTo>
-                    <a:pt x="3581126" y="732430"/>
-                  </a:lnTo>
-                  <a:lnTo>
-                    <a:pt x="3509503" y="706917"/>
-                  </a:lnTo>
-                  <a:lnTo>
-                    <a:pt x="3437881" y="680558"/>
-                  </a:lnTo>
-                  <a:lnTo>
-                    <a:pt x="3366258" y="665155"/>
-                  </a:lnTo>
-                  <a:lnTo>
-                    <a:pt x="3294636" y="654676"/>
-                  </a:lnTo>
-                  <a:lnTo>
-                    <a:pt x="3223013" y="644066"/>
-                  </a:lnTo>
-                  <a:lnTo>
-                    <a:pt x="3151391" y="633322"/>
-                  </a:lnTo>
-                  <a:lnTo>
-                    <a:pt x="3079768" y="622445"/>
-                  </a:lnTo>
-                  <a:lnTo>
-                    <a:pt x="3008146" y="611431"/>
-                  </a:lnTo>
-                  <a:lnTo>
-                    <a:pt x="2936523" y="600279"/>
-                  </a:lnTo>
-                  <a:lnTo>
-                    <a:pt x="2864901" y="588987"/>
-                  </a:lnTo>
-                  <a:lnTo>
-                    <a:pt x="2793278" y="577554"/>
-                  </a:lnTo>
-                  <a:lnTo>
-                    <a:pt x="2721655" y="565978"/>
-                  </a:lnTo>
-                  <a:lnTo>
-                    <a:pt x="2650033" y="554256"/>
-                  </a:lnTo>
-                  <a:lnTo>
-                    <a:pt x="2578410" y="542388"/>
-                  </a:lnTo>
-                  <a:lnTo>
-                    <a:pt x="2506788" y="530371"/>
-                  </a:lnTo>
-                  <a:lnTo>
-                    <a:pt x="2435165" y="518204"/>
-                  </a:lnTo>
-                  <a:lnTo>
-                    <a:pt x="2363543" y="505885"/>
-                  </a:lnTo>
-                  <a:lnTo>
-                    <a:pt x="2291920" y="493411"/>
-                  </a:lnTo>
-                  <a:lnTo>
-                    <a:pt x="2220298" y="480781"/>
-                  </a:lnTo>
-                  <a:lnTo>
-                    <a:pt x="2148675" y="467992"/>
-                  </a:lnTo>
-                  <a:lnTo>
-                    <a:pt x="2077053" y="455044"/>
-                  </a:lnTo>
-                  <a:lnTo>
-                    <a:pt x="2005430" y="441933"/>
-                  </a:lnTo>
-                  <a:lnTo>
-                    <a:pt x="1933808" y="428658"/>
-                  </a:lnTo>
-                  <a:lnTo>
-                    <a:pt x="1862185" y="415217"/>
-                  </a:lnTo>
-                  <a:lnTo>
-                    <a:pt x="1790563" y="401608"/>
-                  </a:lnTo>
-                  <a:lnTo>
-                    <a:pt x="1718940" y="387828"/>
-                  </a:lnTo>
-                  <a:lnTo>
-                    <a:pt x="1647318" y="373875"/>
-                  </a:lnTo>
-                  <a:lnTo>
-                    <a:pt x="1575695" y="359748"/>
-                  </a:lnTo>
-                  <a:lnTo>
-                    <a:pt x="1504073" y="345444"/>
-                  </a:lnTo>
-                  <a:lnTo>
-                    <a:pt x="1432450" y="330960"/>
-                  </a:lnTo>
-                  <a:lnTo>
-                    <a:pt x="1360827" y="316295"/>
-                  </a:lnTo>
-                  <a:lnTo>
-                    <a:pt x="1289205" y="301447"/>
-                  </a:lnTo>
-                  <a:lnTo>
-                    <a:pt x="1217582" y="286413"/>
-                  </a:lnTo>
-                  <a:lnTo>
-                    <a:pt x="1145960" y="271190"/>
-                  </a:lnTo>
-                  <a:lnTo>
-                    <a:pt x="1074337" y="255777"/>
-                  </a:lnTo>
-                  <a:lnTo>
-                    <a:pt x="1002715" y="240170"/>
-                  </a:lnTo>
-                  <a:lnTo>
-                    <a:pt x="931092" y="224368"/>
-                  </a:lnTo>
-                  <a:lnTo>
-                    <a:pt x="859470" y="208368"/>
-                  </a:lnTo>
-                  <a:lnTo>
-                    <a:pt x="787847" y="192168"/>
-                  </a:lnTo>
-                  <a:lnTo>
-                    <a:pt x="716225" y="175765"/>
-                  </a:lnTo>
-                  <a:lnTo>
-                    <a:pt x="644602" y="159157"/>
-                  </a:lnTo>
-                  <a:lnTo>
-                    <a:pt x="572980" y="142340"/>
-                  </a:lnTo>
-                  <a:lnTo>
-                    <a:pt x="501357" y="125313"/>
-                  </a:lnTo>
-                  <a:lnTo>
-                    <a:pt x="429735" y="108072"/>
-                  </a:lnTo>
-                  <a:lnTo>
-                    <a:pt x="358112" y="90616"/>
-                  </a:lnTo>
-                  <a:lnTo>
-                    <a:pt x="286490" y="72941"/>
-                  </a:lnTo>
-                  <a:lnTo>
-                    <a:pt x="214867" y="55045"/>
-                  </a:lnTo>
-                  <a:lnTo>
-                    <a:pt x="143245" y="36924"/>
-                  </a:lnTo>
-                  <a:lnTo>
-                    <a:pt x="71622" y="18577"/>
+                    <a:pt x="7019007" y="1345113"/>
+                  </a:lnTo>
+                  <a:lnTo>
+                    <a:pt x="6947385" y="1339792"/>
+                  </a:lnTo>
+                  <a:lnTo>
+                    <a:pt x="6875762" y="1334294"/>
+                  </a:lnTo>
+                  <a:lnTo>
+                    <a:pt x="6804139" y="1328614"/>
+                  </a:lnTo>
+                  <a:lnTo>
+                    <a:pt x="6732517" y="1322744"/>
+                  </a:lnTo>
+                  <a:lnTo>
+                    <a:pt x="6660894" y="1316680"/>
+                  </a:lnTo>
+                  <a:lnTo>
+                    <a:pt x="6589272" y="1310413"/>
+                  </a:lnTo>
+                  <a:lnTo>
+                    <a:pt x="6517649" y="1303939"/>
+                  </a:lnTo>
+                  <a:lnTo>
+                    <a:pt x="6446027" y="1297249"/>
+                  </a:lnTo>
+                  <a:lnTo>
+                    <a:pt x="6374404" y="1290336"/>
+                  </a:lnTo>
+                  <a:lnTo>
+                    <a:pt x="6302782" y="1283194"/>
+                  </a:lnTo>
+                  <a:lnTo>
+                    <a:pt x="6231159" y="1275814"/>
+                  </a:lnTo>
+                  <a:lnTo>
+                    <a:pt x="6159537" y="1268189"/>
+                  </a:lnTo>
+                  <a:lnTo>
+                    <a:pt x="6087914" y="1260310"/>
+                  </a:lnTo>
+                  <a:lnTo>
+                    <a:pt x="6016292" y="1252170"/>
+                  </a:lnTo>
+                  <a:lnTo>
+                    <a:pt x="5944669" y="1243758"/>
+                  </a:lnTo>
+                  <a:lnTo>
+                    <a:pt x="5873047" y="1235067"/>
+                  </a:lnTo>
+                  <a:lnTo>
+                    <a:pt x="5801424" y="1226087"/>
+                  </a:lnTo>
+                  <a:lnTo>
+                    <a:pt x="5729802" y="1216808"/>
+                  </a:lnTo>
+                  <a:lnTo>
+                    <a:pt x="5658179" y="1207221"/>
+                  </a:lnTo>
+                  <a:lnTo>
+                    <a:pt x="5586557" y="1197315"/>
+                  </a:lnTo>
+                  <a:lnTo>
+                    <a:pt x="5514934" y="1187079"/>
+                  </a:lnTo>
+                  <a:lnTo>
+                    <a:pt x="5443311" y="1176503"/>
+                  </a:lnTo>
+                  <a:lnTo>
+                    <a:pt x="5371689" y="1165576"/>
+                  </a:lnTo>
+                  <a:lnTo>
+                    <a:pt x="5300066" y="1154285"/>
+                  </a:lnTo>
+                  <a:lnTo>
+                    <a:pt x="5228444" y="1142619"/>
+                  </a:lnTo>
+                  <a:lnTo>
+                    <a:pt x="5156821" y="1130565"/>
+                  </a:lnTo>
+                  <a:lnTo>
+                    <a:pt x="5085199" y="1118110"/>
+                  </a:lnTo>
+                  <a:lnTo>
+                    <a:pt x="5013576" y="1105240"/>
+                  </a:lnTo>
+                  <a:lnTo>
+                    <a:pt x="4941954" y="1091943"/>
+                  </a:lnTo>
+                  <a:lnTo>
+                    <a:pt x="4870331" y="1078204"/>
+                  </a:lnTo>
+                  <a:lnTo>
+                    <a:pt x="4798709" y="1064008"/>
+                  </a:lnTo>
+                  <a:lnTo>
+                    <a:pt x="4727086" y="1049339"/>
+                  </a:lnTo>
+                  <a:lnTo>
+                    <a:pt x="4655464" y="1034183"/>
+                  </a:lnTo>
+                  <a:lnTo>
+                    <a:pt x="4583841" y="1018523"/>
+                  </a:lnTo>
+                  <a:lnTo>
+                    <a:pt x="4512219" y="1002343"/>
+                  </a:lnTo>
+                  <a:lnTo>
+                    <a:pt x="4440596" y="985624"/>
+                  </a:lnTo>
+                  <a:lnTo>
+                    <a:pt x="4368974" y="968349"/>
+                  </a:lnTo>
+                  <a:lnTo>
+                    <a:pt x="4297351" y="950500"/>
+                  </a:lnTo>
+                  <a:lnTo>
+                    <a:pt x="4225729" y="932057"/>
+                  </a:lnTo>
+                  <a:lnTo>
+                    <a:pt x="4154106" y="913001"/>
+                  </a:lnTo>
+                  <a:lnTo>
+                    <a:pt x="4082483" y="893312"/>
+                  </a:lnTo>
+                  <a:lnTo>
+                    <a:pt x="4010861" y="872968"/>
+                  </a:lnTo>
+                  <a:lnTo>
+                    <a:pt x="3939238" y="851947"/>
+                  </a:lnTo>
+                  <a:lnTo>
+                    <a:pt x="3867616" y="830227"/>
+                  </a:lnTo>
+                  <a:lnTo>
+                    <a:pt x="3795993" y="807785"/>
+                  </a:lnTo>
+                  <a:lnTo>
+                    <a:pt x="3724371" y="784597"/>
+                  </a:lnTo>
+                  <a:lnTo>
+                    <a:pt x="3652748" y="760637"/>
+                  </a:lnTo>
+                  <a:lnTo>
+                    <a:pt x="3581126" y="735881"/>
+                  </a:lnTo>
+                  <a:lnTo>
+                    <a:pt x="3509503" y="710302"/>
+                  </a:lnTo>
+                  <a:lnTo>
+                    <a:pt x="3437881" y="683872"/>
+                  </a:lnTo>
+                  <a:lnTo>
+                    <a:pt x="3366258" y="668420"/>
+                  </a:lnTo>
+                  <a:lnTo>
+                    <a:pt x="3294636" y="657901"/>
+                  </a:lnTo>
+                  <a:lnTo>
+                    <a:pt x="3223013" y="647251"/>
+                  </a:lnTo>
+                  <a:lnTo>
+                    <a:pt x="3151391" y="636466"/>
+                  </a:lnTo>
+                  <a:lnTo>
+                    <a:pt x="3079768" y="625546"/>
+                  </a:lnTo>
+                  <a:lnTo>
+                    <a:pt x="3008146" y="614489"/>
+                  </a:lnTo>
+                  <a:lnTo>
+                    <a:pt x="2936523" y="603293"/>
+                  </a:lnTo>
+                  <a:lnTo>
+                    <a:pt x="2864901" y="591956"/>
+                  </a:lnTo>
+                  <a:lnTo>
+                    <a:pt x="2793278" y="580476"/>
+                  </a:lnTo>
+                  <a:lnTo>
+                    <a:pt x="2721655" y="568852"/>
+                  </a:lnTo>
+                  <a:lnTo>
+                    <a:pt x="2650033" y="557082"/>
+                  </a:lnTo>
+                  <a:lnTo>
+                    <a:pt x="2578410" y="545164"/>
+                  </a:lnTo>
+                  <a:lnTo>
+                    <a:pt x="2506788" y="533097"/>
+                  </a:lnTo>
+                  <a:lnTo>
+                    <a:pt x="2435165" y="520877"/>
+                  </a:lnTo>
+                  <a:lnTo>
+                    <a:pt x="2363543" y="508504"/>
+                  </a:lnTo>
+                  <a:lnTo>
+                    <a:pt x="2291920" y="495975"/>
+                  </a:lnTo>
+                  <a:lnTo>
+                    <a:pt x="2220298" y="483289"/>
+                  </a:lnTo>
+                  <a:lnTo>
+                    <a:pt x="2148675" y="470444"/>
+                  </a:lnTo>
+                  <a:lnTo>
+                    <a:pt x="2077053" y="457437"/>
+                  </a:lnTo>
+                  <a:lnTo>
+                    <a:pt x="2005430" y="444266"/>
+                  </a:lnTo>
+                  <a:lnTo>
+                    <a:pt x="1933808" y="430930"/>
+                  </a:lnTo>
+                  <a:lnTo>
+                    <a:pt x="1862185" y="417426"/>
+                  </a:lnTo>
+                  <a:lnTo>
+                    <a:pt x="1790563" y="403752"/>
+                  </a:lnTo>
+                  <a:lnTo>
+                    <a:pt x="1718940" y="389907"/>
+                  </a:lnTo>
+                  <a:lnTo>
+                    <a:pt x="1647318" y="375887"/>
+                  </a:lnTo>
+                  <a:lnTo>
+                    <a:pt x="1575695" y="361691"/>
+                  </a:lnTo>
+                  <a:lnTo>
+                    <a:pt x="1504073" y="347317"/>
+                  </a:lnTo>
+                  <a:lnTo>
+                    <a:pt x="1432450" y="332762"/>
+                  </a:lnTo>
+                  <a:lnTo>
+                    <a:pt x="1360827" y="318024"/>
+                  </a:lnTo>
+                  <a:lnTo>
+                    <a:pt x="1289205" y="303101"/>
+                  </a:lnTo>
+                  <a:lnTo>
+                    <a:pt x="1217582" y="287990"/>
+                  </a:lnTo>
+                  <a:lnTo>
+                    <a:pt x="1145960" y="272690"/>
+                  </a:lnTo>
+                  <a:lnTo>
+                    <a:pt x="1074337" y="257197"/>
+                  </a:lnTo>
+                  <a:lnTo>
+                    <a:pt x="1002715" y="241509"/>
+                  </a:lnTo>
+                  <a:lnTo>
+                    <a:pt x="931092" y="225624"/>
+                  </a:lnTo>
+                  <a:lnTo>
+                    <a:pt x="859470" y="209539"/>
+                  </a:lnTo>
+                  <a:lnTo>
+                    <a:pt x="787847" y="193252"/>
+                  </a:lnTo>
+                  <a:lnTo>
+                    <a:pt x="716225" y="176760"/>
+                  </a:lnTo>
+                  <a:lnTo>
+                    <a:pt x="644602" y="160061"/>
+                  </a:lnTo>
+                  <a:lnTo>
+                    <a:pt x="572980" y="143152"/>
+                  </a:lnTo>
+                  <a:lnTo>
+                    <a:pt x="501357" y="126031"/>
+                  </a:lnTo>
+                  <a:lnTo>
+                    <a:pt x="429735" y="108694"/>
+                  </a:lnTo>
+                  <a:lnTo>
+                    <a:pt x="358112" y="91139"/>
+                  </a:lnTo>
+                  <a:lnTo>
+                    <a:pt x="286490" y="73364"/>
+                  </a:lnTo>
+                  <a:lnTo>
+                    <a:pt x="214867" y="55365"/>
+                  </a:lnTo>
+                  <a:lnTo>
+                    <a:pt x="143245" y="37140"/>
+                  </a:lnTo>
+                  <a:lnTo>
+                    <a:pt x="71622" y="18686"/>
                   </a:lnTo>
                   <a:lnTo>
                     <a:pt x="0" y="0"/>
@@ -4695,312 +4695,312 @@
           </p:nvSpPr>
           <p:spPr>
             <a:xfrm>
-              <a:off x="1172049" y="3127437"/>
-              <a:ext cx="7090630" cy="2168769"/>
+              <a:off x="1172049" y="3119553"/>
+              <a:ext cx="7090630" cy="2177561"/>
             </a:xfrm>
             <a:custGeom>
               <a:avLst/>
               <a:pathLst>
-                <a:path w="7090630" h="2168769">
+                <a:path w="7090630" h="2177561">
                   <a:moveTo>
                     <a:pt x="0" y="0"/>
                   </a:moveTo>
                   <a:lnTo>
-                    <a:pt x="71622" y="54141"/>
-                  </a:lnTo>
-                  <a:lnTo>
-                    <a:pt x="143245" y="107076"/>
-                  </a:lnTo>
-                  <a:lnTo>
-                    <a:pt x="214867" y="158832"/>
-                  </a:lnTo>
-                  <a:lnTo>
-                    <a:pt x="286490" y="209434"/>
-                  </a:lnTo>
-                  <a:lnTo>
-                    <a:pt x="358112" y="258909"/>
-                  </a:lnTo>
-                  <a:lnTo>
-                    <a:pt x="429735" y="307282"/>
-                  </a:lnTo>
-                  <a:lnTo>
-                    <a:pt x="501357" y="354577"/>
-                  </a:lnTo>
-                  <a:lnTo>
-                    <a:pt x="572980" y="400817"/>
-                  </a:lnTo>
-                  <a:lnTo>
-                    <a:pt x="644602" y="446028"/>
-                  </a:lnTo>
-                  <a:lnTo>
-                    <a:pt x="716225" y="490231"/>
-                  </a:lnTo>
-                  <a:lnTo>
-                    <a:pt x="787847" y="533449"/>
-                  </a:lnTo>
-                  <a:lnTo>
-                    <a:pt x="859470" y="575704"/>
-                  </a:lnTo>
-                  <a:lnTo>
-                    <a:pt x="931092" y="617018"/>
-                  </a:lnTo>
-                  <a:lnTo>
-                    <a:pt x="1002715" y="657411"/>
-                  </a:lnTo>
-                  <a:lnTo>
-                    <a:pt x="1074337" y="696904"/>
-                  </a:lnTo>
-                  <a:lnTo>
-                    <a:pt x="1145960" y="735517"/>
-                  </a:lnTo>
-                  <a:lnTo>
-                    <a:pt x="1217582" y="773270"/>
-                  </a:lnTo>
-                  <a:lnTo>
-                    <a:pt x="1289205" y="810181"/>
-                  </a:lnTo>
-                  <a:lnTo>
-                    <a:pt x="1360827" y="846270"/>
-                  </a:lnTo>
-                  <a:lnTo>
-                    <a:pt x="1432450" y="881555"/>
-                  </a:lnTo>
-                  <a:lnTo>
-                    <a:pt x="1504073" y="916053"/>
-                  </a:lnTo>
-                  <a:lnTo>
-                    <a:pt x="1575695" y="949783"/>
-                  </a:lnTo>
-                  <a:lnTo>
-                    <a:pt x="1647318" y="982762"/>
-                  </a:lnTo>
-                  <a:lnTo>
-                    <a:pt x="1718940" y="1015005"/>
-                  </a:lnTo>
-                  <a:lnTo>
-                    <a:pt x="1790563" y="1046530"/>
-                  </a:lnTo>
-                  <a:lnTo>
-                    <a:pt x="1862185" y="1077353"/>
-                  </a:lnTo>
-                  <a:lnTo>
-                    <a:pt x="1933808" y="1107488"/>
-                  </a:lnTo>
-                  <a:lnTo>
-                    <a:pt x="2005430" y="1136953"/>
-                  </a:lnTo>
-                  <a:lnTo>
-                    <a:pt x="2077053" y="1165761"/>
-                  </a:lnTo>
-                  <a:lnTo>
-                    <a:pt x="2148675" y="1193926"/>
-                  </a:lnTo>
-                  <a:lnTo>
-                    <a:pt x="2220298" y="1221465"/>
-                  </a:lnTo>
-                  <a:lnTo>
-                    <a:pt x="2291920" y="1248389"/>
-                  </a:lnTo>
-                  <a:lnTo>
-                    <a:pt x="2363543" y="1274714"/>
-                  </a:lnTo>
-                  <a:lnTo>
-                    <a:pt x="2435165" y="1300452"/>
-                  </a:lnTo>
-                  <a:lnTo>
-                    <a:pt x="2506788" y="1325617"/>
-                  </a:lnTo>
-                  <a:lnTo>
-                    <a:pt x="2578410" y="1350221"/>
-                  </a:lnTo>
-                  <a:lnTo>
-                    <a:pt x="2650033" y="1374276"/>
-                  </a:lnTo>
-                  <a:lnTo>
-                    <a:pt x="2721655" y="1397796"/>
-                  </a:lnTo>
-                  <a:lnTo>
-                    <a:pt x="2793278" y="1420792"/>
-                  </a:lnTo>
-                  <a:lnTo>
-                    <a:pt x="2864901" y="1443275"/>
-                  </a:lnTo>
-                  <a:lnTo>
-                    <a:pt x="2936523" y="1465257"/>
-                  </a:lnTo>
-                  <a:lnTo>
-                    <a:pt x="3008146" y="1486749"/>
-                  </a:lnTo>
-                  <a:lnTo>
-                    <a:pt x="3079768" y="1507763"/>
-                  </a:lnTo>
-                  <a:lnTo>
-                    <a:pt x="3151391" y="1528308"/>
-                  </a:lnTo>
-                  <a:lnTo>
-                    <a:pt x="3223013" y="1548396"/>
-                  </a:lnTo>
-                  <a:lnTo>
-                    <a:pt x="3294636" y="1568036"/>
-                  </a:lnTo>
-                  <a:lnTo>
-                    <a:pt x="3366258" y="1587238"/>
-                  </a:lnTo>
-                  <a:lnTo>
-                    <a:pt x="3437881" y="1606012"/>
-                  </a:lnTo>
-                  <a:lnTo>
-                    <a:pt x="3509503" y="1624368"/>
-                  </a:lnTo>
-                  <a:lnTo>
-                    <a:pt x="3581126" y="1642315"/>
-                  </a:lnTo>
-                  <a:lnTo>
-                    <a:pt x="3652748" y="1659863"/>
-                  </a:lnTo>
-                  <a:lnTo>
-                    <a:pt x="3724371" y="1677019"/>
-                  </a:lnTo>
-                  <a:lnTo>
-                    <a:pt x="3795993" y="1693793"/>
-                  </a:lnTo>
-                  <a:lnTo>
-                    <a:pt x="3867616" y="1710193"/>
-                  </a:lnTo>
-                  <a:lnTo>
-                    <a:pt x="3939238" y="1726228"/>
-                  </a:lnTo>
-                  <a:lnTo>
-                    <a:pt x="4010861" y="1741905"/>
-                  </a:lnTo>
-                  <a:lnTo>
-                    <a:pt x="4082483" y="1757233"/>
-                  </a:lnTo>
-                  <a:lnTo>
-                    <a:pt x="4154106" y="1772220"/>
-                  </a:lnTo>
-                  <a:lnTo>
-                    <a:pt x="4225729" y="1786872"/>
-                  </a:lnTo>
-                  <a:lnTo>
-                    <a:pt x="4297351" y="1801198"/>
-                  </a:lnTo>
-                  <a:lnTo>
-                    <a:pt x="4368974" y="1815205"/>
-                  </a:lnTo>
-                  <a:lnTo>
-                    <a:pt x="4440596" y="1828900"/>
-                  </a:lnTo>
-                  <a:lnTo>
-                    <a:pt x="4512219" y="1842290"/>
-                  </a:lnTo>
-                  <a:lnTo>
-                    <a:pt x="4583841" y="1855381"/>
-                  </a:lnTo>
-                  <a:lnTo>
-                    <a:pt x="4655464" y="1868181"/>
-                  </a:lnTo>
-                  <a:lnTo>
-                    <a:pt x="4727086" y="1880695"/>
-                  </a:lnTo>
-                  <a:lnTo>
-                    <a:pt x="4798709" y="1892930"/>
-                  </a:lnTo>
-                  <a:lnTo>
-                    <a:pt x="4870331" y="1904893"/>
-                  </a:lnTo>
-                  <a:lnTo>
-                    <a:pt x="4941954" y="1916590"/>
-                  </a:lnTo>
-                  <a:lnTo>
-                    <a:pt x="5013576" y="1928025"/>
-                  </a:lnTo>
-                  <a:lnTo>
-                    <a:pt x="5085199" y="1939206"/>
-                  </a:lnTo>
-                  <a:lnTo>
-                    <a:pt x="5156821" y="1950138"/>
-                  </a:lnTo>
-                  <a:lnTo>
-                    <a:pt x="5228444" y="1960826"/>
-                  </a:lnTo>
-                  <a:lnTo>
-                    <a:pt x="5300066" y="1971276"/>
-                  </a:lnTo>
-                  <a:lnTo>
-                    <a:pt x="5371689" y="1981494"/>
-                  </a:lnTo>
-                  <a:lnTo>
-                    <a:pt x="5443311" y="1991483"/>
-                  </a:lnTo>
-                  <a:lnTo>
-                    <a:pt x="5514934" y="2001250"/>
-                  </a:lnTo>
-                  <a:lnTo>
-                    <a:pt x="5586557" y="2010799"/>
-                  </a:lnTo>
-                  <a:lnTo>
-                    <a:pt x="5658179" y="2020136"/>
-                  </a:lnTo>
-                  <a:lnTo>
-                    <a:pt x="5729802" y="2029264"/>
-                  </a:lnTo>
-                  <a:lnTo>
-                    <a:pt x="5801424" y="2038189"/>
-                  </a:lnTo>
-                  <a:lnTo>
-                    <a:pt x="5873047" y="2046916"/>
-                  </a:lnTo>
-                  <a:lnTo>
-                    <a:pt x="5944669" y="2055447"/>
-                  </a:lnTo>
-                  <a:lnTo>
-                    <a:pt x="6016292" y="2063789"/>
-                  </a:lnTo>
-                  <a:lnTo>
-                    <a:pt x="6087914" y="2071945"/>
-                  </a:lnTo>
-                  <a:lnTo>
-                    <a:pt x="6159537" y="2079919"/>
-                  </a:lnTo>
-                  <a:lnTo>
-                    <a:pt x="6231159" y="2087715"/>
-                  </a:lnTo>
-                  <a:lnTo>
-                    <a:pt x="6302782" y="2095338"/>
-                  </a:lnTo>
-                  <a:lnTo>
-                    <a:pt x="6374404" y="2102791"/>
-                  </a:lnTo>
-                  <a:lnTo>
-                    <a:pt x="6446027" y="2110077"/>
-                  </a:lnTo>
-                  <a:lnTo>
-                    <a:pt x="6517649" y="2117202"/>
-                  </a:lnTo>
-                  <a:lnTo>
-                    <a:pt x="6589272" y="2124168"/>
-                  </a:lnTo>
-                  <a:lnTo>
-                    <a:pt x="6660894" y="2130978"/>
-                  </a:lnTo>
-                  <a:lnTo>
-                    <a:pt x="6732517" y="2137637"/>
-                  </a:lnTo>
-                  <a:lnTo>
-                    <a:pt x="6804139" y="2144147"/>
-                  </a:lnTo>
-                  <a:lnTo>
-                    <a:pt x="6875762" y="2150512"/>
-                  </a:lnTo>
-                  <a:lnTo>
-                    <a:pt x="6947385" y="2156736"/>
-                  </a:lnTo>
-                  <a:lnTo>
-                    <a:pt x="7019007" y="2162820"/>
-                  </a:lnTo>
-                  <a:lnTo>
-                    <a:pt x="7090630" y="2168769"/>
+                    <a:pt x="71622" y="54479"/>
+                  </a:lnTo>
+                  <a:lnTo>
+                    <a:pt x="143245" y="107740"/>
+                  </a:lnTo>
+                  <a:lnTo>
+                    <a:pt x="214867" y="159812"/>
+                  </a:lnTo>
+                  <a:lnTo>
+                    <a:pt x="286490" y="210719"/>
+                  </a:lnTo>
+                  <a:lnTo>
+                    <a:pt x="358112" y="260489"/>
+                  </a:lnTo>
+                  <a:lnTo>
+                    <a:pt x="429735" y="309146"/>
+                  </a:lnTo>
+                  <a:lnTo>
+                    <a:pt x="501357" y="356717"/>
+                  </a:lnTo>
+                  <a:lnTo>
+                    <a:pt x="572980" y="403224"/>
+                  </a:lnTo>
+                  <a:lnTo>
+                    <a:pt x="644602" y="448691"/>
+                  </a:lnTo>
+                  <a:lnTo>
+                    <a:pt x="716225" y="493143"/>
+                  </a:lnTo>
+                  <a:lnTo>
+                    <a:pt x="787847" y="536601"/>
+                  </a:lnTo>
+                  <a:lnTo>
+                    <a:pt x="859470" y="579088"/>
+                  </a:lnTo>
+                  <a:lnTo>
+                    <a:pt x="931092" y="620625"/>
+                  </a:lnTo>
+                  <a:lnTo>
+                    <a:pt x="1002715" y="661234"/>
+                  </a:lnTo>
+                  <a:lnTo>
+                    <a:pt x="1074337" y="700935"/>
+                  </a:lnTo>
+                  <a:lnTo>
+                    <a:pt x="1145960" y="739750"/>
+                  </a:lnTo>
+                  <a:lnTo>
+                    <a:pt x="1217582" y="777696"/>
+                  </a:lnTo>
+                  <a:lnTo>
+                    <a:pt x="1289205" y="814795"/>
+                  </a:lnTo>
+                  <a:lnTo>
+                    <a:pt x="1360827" y="851065"/>
+                  </a:lnTo>
+                  <a:lnTo>
+                    <a:pt x="1432450" y="886524"/>
+                  </a:lnTo>
+                  <a:lnTo>
+                    <a:pt x="1504073" y="921190"/>
+                  </a:lnTo>
+                  <a:lnTo>
+                    <a:pt x="1575695" y="955082"/>
+                  </a:lnTo>
+                  <a:lnTo>
+                    <a:pt x="1647318" y="988216"/>
+                  </a:lnTo>
+                  <a:lnTo>
+                    <a:pt x="1718940" y="1020610"/>
+                  </a:lnTo>
+                  <a:lnTo>
+                    <a:pt x="1790563" y="1052280"/>
+                  </a:lnTo>
+                  <a:lnTo>
+                    <a:pt x="1862185" y="1083242"/>
+                  </a:lnTo>
+                  <a:lnTo>
+                    <a:pt x="1933808" y="1113512"/>
+                  </a:lnTo>
+                  <a:lnTo>
+                    <a:pt x="2005430" y="1143106"/>
+                  </a:lnTo>
+                  <a:lnTo>
+                    <a:pt x="2077053" y="1172038"/>
+                  </a:lnTo>
+                  <a:lnTo>
+                    <a:pt x="2148675" y="1200324"/>
+                  </a:lnTo>
+                  <a:lnTo>
+                    <a:pt x="2220298" y="1227978"/>
+                  </a:lnTo>
+                  <a:lnTo>
+                    <a:pt x="2291920" y="1255013"/>
+                  </a:lnTo>
+                  <a:lnTo>
+                    <a:pt x="2363543" y="1281444"/>
+                  </a:lnTo>
+                  <a:lnTo>
+                    <a:pt x="2435165" y="1307285"/>
+                  </a:lnTo>
+                  <a:lnTo>
+                    <a:pt x="2506788" y="1332548"/>
+                  </a:lnTo>
+                  <a:lnTo>
+                    <a:pt x="2578410" y="1357247"/>
+                  </a:lnTo>
+                  <a:lnTo>
+                    <a:pt x="2650033" y="1381393"/>
+                  </a:lnTo>
+                  <a:lnTo>
+                    <a:pt x="2721655" y="1405000"/>
+                  </a:lnTo>
+                  <a:lnTo>
+                    <a:pt x="2793278" y="1428079"/>
+                  </a:lnTo>
+                  <a:lnTo>
+                    <a:pt x="2864901" y="1450643"/>
+                  </a:lnTo>
+                  <a:lnTo>
+                    <a:pt x="2936523" y="1472702"/>
+                  </a:lnTo>
+                  <a:lnTo>
+                    <a:pt x="3008146" y="1494268"/>
+                  </a:lnTo>
+                  <a:lnTo>
+                    <a:pt x="3079768" y="1515353"/>
+                  </a:lnTo>
+                  <a:lnTo>
+                    <a:pt x="3151391" y="1535966"/>
+                  </a:lnTo>
+                  <a:lnTo>
+                    <a:pt x="3223013" y="1556118"/>
+                  </a:lnTo>
+                  <a:lnTo>
+                    <a:pt x="3294636" y="1575820"/>
+                  </a:lnTo>
+                  <a:lnTo>
+                    <a:pt x="3366258" y="1595082"/>
+                  </a:lnTo>
+                  <a:lnTo>
+                    <a:pt x="3437881" y="1613913"/>
+                  </a:lnTo>
+                  <a:lnTo>
+                    <a:pt x="3509503" y="1632324"/>
+                  </a:lnTo>
+                  <a:lnTo>
+                    <a:pt x="3581126" y="1650323"/>
+                  </a:lnTo>
+                  <a:lnTo>
+                    <a:pt x="3652748" y="1667919"/>
+                  </a:lnTo>
+                  <a:lnTo>
+                    <a:pt x="3724371" y="1685123"/>
+                  </a:lnTo>
+                  <a:lnTo>
+                    <a:pt x="3795993" y="1701942"/>
+                  </a:lnTo>
+                  <a:lnTo>
+                    <a:pt x="3867616" y="1718385"/>
+                  </a:lnTo>
+                  <a:lnTo>
+                    <a:pt x="3939238" y="1734460"/>
+                  </a:lnTo>
+                  <a:lnTo>
+                    <a:pt x="4010861" y="1750177"/>
+                  </a:lnTo>
+                  <a:lnTo>
+                    <a:pt x="4082483" y="1765542"/>
+                  </a:lnTo>
+                  <a:lnTo>
+                    <a:pt x="4154106" y="1780563"/>
+                  </a:lnTo>
+                  <a:lnTo>
+                    <a:pt x="4225729" y="1795249"/>
+                  </a:lnTo>
+                  <a:lnTo>
+                    <a:pt x="4297351" y="1809607"/>
+                  </a:lnTo>
+                  <a:lnTo>
+                    <a:pt x="4368974" y="1823644"/>
+                  </a:lnTo>
+                  <a:lnTo>
+                    <a:pt x="4440596" y="1837367"/>
+                  </a:lnTo>
+                  <a:lnTo>
+                    <a:pt x="4512219" y="1850784"/>
+                  </a:lnTo>
+                  <a:lnTo>
+                    <a:pt x="4583841" y="1863901"/>
+                  </a:lnTo>
+                  <a:lnTo>
+                    <a:pt x="4655464" y="1876724"/>
+                  </a:lnTo>
+                  <a:lnTo>
+                    <a:pt x="4727086" y="1889261"/>
+                  </a:lnTo>
+                  <a:lnTo>
+                    <a:pt x="4798709" y="1901518"/>
+                  </a:lnTo>
+                  <a:lnTo>
+                    <a:pt x="4870331" y="1913501"/>
+                  </a:lnTo>
+                  <a:lnTo>
+                    <a:pt x="4941954" y="1925216"/>
+                  </a:lnTo>
+                  <a:lnTo>
+                    <a:pt x="5013576" y="1936669"/>
+                  </a:lnTo>
+                  <a:lnTo>
+                    <a:pt x="5085199" y="1947866"/>
+                  </a:lnTo>
+                  <a:lnTo>
+                    <a:pt x="5156821" y="1958813"/>
+                  </a:lnTo>
+                  <a:lnTo>
+                    <a:pt x="5228444" y="1969515"/>
+                  </a:lnTo>
+                  <a:lnTo>
+                    <a:pt x="5300066" y="1979979"/>
+                  </a:lnTo>
+                  <a:lnTo>
+                    <a:pt x="5371689" y="1990208"/>
+                  </a:lnTo>
+                  <a:lnTo>
+                    <a:pt x="5443311" y="2000209"/>
+                  </a:lnTo>
+                  <a:lnTo>
+                    <a:pt x="5514934" y="2009986"/>
+                  </a:lnTo>
+                  <a:lnTo>
+                    <a:pt x="5586557" y="2019545"/>
+                  </a:lnTo>
+                  <a:lnTo>
+                    <a:pt x="5658179" y="2028890"/>
+                  </a:lnTo>
+                  <a:lnTo>
+                    <a:pt x="5729802" y="2038026"/>
+                  </a:lnTo>
+                  <a:lnTo>
+                    <a:pt x="5801424" y="2046958"/>
+                  </a:lnTo>
+                  <a:lnTo>
+                    <a:pt x="5873047" y="2055690"/>
+                  </a:lnTo>
+                  <a:lnTo>
+                    <a:pt x="5944669" y="2064228"/>
+                  </a:lnTo>
+                  <a:lnTo>
+                    <a:pt x="6016292" y="2072574"/>
+                  </a:lnTo>
+                  <a:lnTo>
+                    <a:pt x="6087914" y="2080734"/>
+                  </a:lnTo>
+                  <a:lnTo>
+                    <a:pt x="6159537" y="2088712"/>
+                  </a:lnTo>
+                  <a:lnTo>
+                    <a:pt x="6231159" y="2096511"/>
+                  </a:lnTo>
+                  <a:lnTo>
+                    <a:pt x="6302782" y="2104136"/>
+                  </a:lnTo>
+                  <a:lnTo>
+                    <a:pt x="6374404" y="2111591"/>
+                  </a:lnTo>
+                  <a:lnTo>
+                    <a:pt x="6446027" y="2118879"/>
+                  </a:lnTo>
+                  <a:lnTo>
+                    <a:pt x="6517649" y="2126004"/>
+                  </a:lnTo>
+                  <a:lnTo>
+                    <a:pt x="6589272" y="2132970"/>
+                  </a:lnTo>
+                  <a:lnTo>
+                    <a:pt x="6660894" y="2139780"/>
+                  </a:lnTo>
+                  <a:lnTo>
+                    <a:pt x="6732517" y="2146438"/>
+                  </a:lnTo>
+                  <a:lnTo>
+                    <a:pt x="6804139" y="2152947"/>
+                  </a:lnTo>
+                  <a:lnTo>
+                    <a:pt x="6875762" y="2159311"/>
+                  </a:lnTo>
+                  <a:lnTo>
+                    <a:pt x="6947385" y="2165532"/>
+                  </a:lnTo>
+                  <a:lnTo>
+                    <a:pt x="7019007" y="2171615"/>
+                  </a:lnTo>
+                  <a:lnTo>
+                    <a:pt x="7090630" y="2177561"/>
                   </a:lnTo>
                 </a:path>
               </a:pathLst>
@@ -5884,7 +5884,7 @@
                   <a:latin typeface="Helvetica"/>
                   <a:cs typeface="Helvetica"/>
                 </a:rPr>
-                <a:t>subHR per 10 % decline: 1.31 (1.16-1.48), p_Bonf = &lt;0.001 (n = 6)  |  per IQR decline (Δ = 29.3 %): 2.21 (1.55-3.15)  |  IQR: [-14.6, 14.7] %</a:t>
+                <a:t>subHR per 10 % decline: 1.31 (1.16-1.48), p_Bonf = &lt;0.001 (n = 6)  |  per IQR decline (Δ = 29.3 %): 2.21 (1.55-3.16)  |  IQR: [-14.6, 14.7] %</a:t>
               </a:r>
             </a:p>
           </p:txBody>
